--- a/slides/Module4_Red_Teaming.pptx
+++ b/slides/Module4_Red_Teaming.pptx
@@ -5,22 +5,22 @@
     <p:sldMasterId id="2147483648" r:id="rId1"/>
   </p:sldMasterIdLst>
   <p:sldIdLst>
-    <p:sldId id="256" r:id="rId7"/>
-    <p:sldId id="257" r:id="rId8"/>
-    <p:sldId id="258" r:id="rId9"/>
-    <p:sldId id="259" r:id="rId10"/>
-    <p:sldId id="260" r:id="rId11"/>
-    <p:sldId id="261" r:id="rId12"/>
-    <p:sldId id="262" r:id="rId13"/>
-    <p:sldId id="263" r:id="rId14"/>
-    <p:sldId id="264" r:id="rId15"/>
-    <p:sldId id="265" r:id="rId16"/>
-    <p:sldId id="266" r:id="rId17"/>
-    <p:sldId id="267" r:id="rId18"/>
-    <p:sldId id="268" r:id="rId19"/>
-    <p:sldId id="269" r:id="rId20"/>
+    <p:sldId id="256" r:id="rId2"/>
+    <p:sldId id="257" r:id="rId3"/>
+    <p:sldId id="258" r:id="rId4"/>
+    <p:sldId id="259" r:id="rId5"/>
+    <p:sldId id="260" r:id="rId6"/>
+    <p:sldId id="261" r:id="rId7"/>
+    <p:sldId id="262" r:id="rId8"/>
+    <p:sldId id="263" r:id="rId9"/>
+    <p:sldId id="264" r:id="rId10"/>
+    <p:sldId id="265" r:id="rId11"/>
+    <p:sldId id="266" r:id="rId12"/>
+    <p:sldId id="267" r:id="rId13"/>
+    <p:sldId id="268" r:id="rId14"/>
+    <p:sldId id="269" r:id="rId15"/>
   </p:sldIdLst>
-  <p:sldSz cx="12191695" cy="6858000" type="screen4x3"/>
+  <p:sldSz cx="12192000" cy="6858000"/>
   <p:notesSz cx="6858000" cy="9144000"/>
   <p:defaultTextStyle>
     <a:defPPr>
@@ -117,6 +117,22 @@
       </a:defRPr>
     </a:lvl9pPr>
   </p:defaultTextStyle>
+  <p:extLst>
+    <p:ext uri="{EFAFB233-063F-42B5-8137-9DF3F51BA10A}">
+      <p15:sldGuideLst xmlns:p15="http://schemas.microsoft.com/office/powerpoint/2012/main">
+        <p15:guide id="1" orient="horz" pos="2160">
+          <p15:clr>
+            <a:srgbClr val="A4A3A4"/>
+          </p15:clr>
+        </p15:guide>
+        <p15:guide id="2" pos="2880">
+          <p15:clr>
+            <a:srgbClr val="A4A3A4"/>
+          </p15:clr>
+        </p15:guide>
+      </p15:sldGuideLst>
+    </p:ext>
+  </p:extLst>
 </p:presentation>
 </file>
 
@@ -158,10 +174,9 @@
           <a:lstStyle/>
           <a:p>
             <a:r>
-              <a:rPr lang="en-US" smtClean="0"/>
+              <a:rPr lang="en-US"/>
               <a:t>Click to edit Master title style</a:t>
             </a:r>
-            <a:endParaRPr lang="en-US"/>
           </a:p>
         </p:txBody>
       </p:sp>
@@ -277,10 +292,9 @@
           </a:lstStyle>
           <a:p>
             <a:r>
-              <a:rPr lang="en-US" smtClean="0"/>
+              <a:rPr lang="en-US"/>
               <a:t>Click to edit Master subtitle style</a:t>
             </a:r>
-            <a:endParaRPr lang="en-US"/>
           </a:p>
         </p:txBody>
       </p:sp>
@@ -301,7 +315,7 @@
           <a:p>
             <a:fld id="{5BCAD085-E8A6-8845-BD4E-CB4CCA059FC4}" type="datetimeFigureOut">
               <a:rPr lang="en-US" smtClean="0"/>
-              <a:t>1/27/13</a:t>
+              <a:t>8/20/26</a:t>
             </a:fld>
             <a:endParaRPr lang="en-US"/>
           </a:p>
@@ -395,10 +409,9 @@
           <a:lstStyle/>
           <a:p>
             <a:r>
-              <a:rPr lang="en-US" smtClean="0"/>
+              <a:rPr lang="en-US"/>
               <a:t>Click to edit Master title style</a:t>
             </a:r>
-            <a:endParaRPr lang="en-US"/>
           </a:p>
         </p:txBody>
       </p:sp>
@@ -419,38 +432,37 @@
           <a:p>
             <a:pPr lvl="0"/>
             <a:r>
-              <a:rPr lang="en-US" smtClean="0"/>
+              <a:rPr lang="en-US"/>
               <a:t>Click to edit Master text styles</a:t>
             </a:r>
           </a:p>
           <a:p>
             <a:pPr lvl="1"/>
             <a:r>
-              <a:rPr lang="en-US" smtClean="0"/>
+              <a:rPr lang="en-US"/>
               <a:t>Second level</a:t>
             </a:r>
           </a:p>
           <a:p>
             <a:pPr lvl="2"/>
             <a:r>
-              <a:rPr lang="en-US" smtClean="0"/>
+              <a:rPr lang="en-US"/>
               <a:t>Third level</a:t>
             </a:r>
           </a:p>
           <a:p>
             <a:pPr lvl="3"/>
             <a:r>
-              <a:rPr lang="en-US" smtClean="0"/>
+              <a:rPr lang="en-US"/>
               <a:t>Fourth level</a:t>
             </a:r>
           </a:p>
           <a:p>
             <a:pPr lvl="4"/>
             <a:r>
-              <a:rPr lang="en-US" smtClean="0"/>
+              <a:rPr lang="en-US"/>
               <a:t>Fifth level</a:t>
             </a:r>
-            <a:endParaRPr lang="en-US"/>
           </a:p>
         </p:txBody>
       </p:sp>
@@ -471,7 +483,7 @@
           <a:p>
             <a:fld id="{5BCAD085-E8A6-8845-BD4E-CB4CCA059FC4}" type="datetimeFigureOut">
               <a:rPr lang="en-US" smtClean="0"/>
-              <a:t>1/27/13</a:t>
+              <a:t>8/20/26</a:t>
             </a:fld>
             <a:endParaRPr lang="en-US"/>
           </a:p>
@@ -570,10 +582,9 @@
           <a:lstStyle/>
           <a:p>
             <a:r>
-              <a:rPr lang="en-US" smtClean="0"/>
+              <a:rPr lang="en-US"/>
               <a:t>Click to edit Master title style</a:t>
             </a:r>
-            <a:endParaRPr lang="en-US"/>
           </a:p>
         </p:txBody>
       </p:sp>
@@ -599,38 +610,37 @@
           <a:p>
             <a:pPr lvl="0"/>
             <a:r>
-              <a:rPr lang="en-US" smtClean="0"/>
+              <a:rPr lang="en-US"/>
               <a:t>Click to edit Master text styles</a:t>
             </a:r>
           </a:p>
           <a:p>
             <a:pPr lvl="1"/>
             <a:r>
-              <a:rPr lang="en-US" smtClean="0"/>
+              <a:rPr lang="en-US"/>
               <a:t>Second level</a:t>
             </a:r>
           </a:p>
           <a:p>
             <a:pPr lvl="2"/>
             <a:r>
-              <a:rPr lang="en-US" smtClean="0"/>
+              <a:rPr lang="en-US"/>
               <a:t>Third level</a:t>
             </a:r>
           </a:p>
           <a:p>
             <a:pPr lvl="3"/>
             <a:r>
-              <a:rPr lang="en-US" smtClean="0"/>
+              <a:rPr lang="en-US"/>
               <a:t>Fourth level</a:t>
             </a:r>
           </a:p>
           <a:p>
             <a:pPr lvl="4"/>
             <a:r>
-              <a:rPr lang="en-US" smtClean="0"/>
+              <a:rPr lang="en-US"/>
               <a:t>Fifth level</a:t>
             </a:r>
-            <a:endParaRPr lang="en-US"/>
           </a:p>
         </p:txBody>
       </p:sp>
@@ -651,7 +661,7 @@
           <a:p>
             <a:fld id="{5BCAD085-E8A6-8845-BD4E-CB4CCA059FC4}" type="datetimeFigureOut">
               <a:rPr lang="en-US" smtClean="0"/>
-              <a:t>1/27/13</a:t>
+              <a:t>8/20/26</a:t>
             </a:fld>
             <a:endParaRPr lang="en-US"/>
           </a:p>
@@ -745,10 +755,9 @@
           <a:lstStyle/>
           <a:p>
             <a:r>
-              <a:rPr lang="en-US" smtClean="0"/>
+              <a:rPr lang="en-US"/>
               <a:t>Click to edit Master title style</a:t>
             </a:r>
-            <a:endParaRPr lang="en-US"/>
           </a:p>
         </p:txBody>
       </p:sp>
@@ -769,38 +778,37 @@
           <a:p>
             <a:pPr lvl="0"/>
             <a:r>
-              <a:rPr lang="en-US" smtClean="0"/>
+              <a:rPr lang="en-US"/>
               <a:t>Click to edit Master text styles</a:t>
             </a:r>
           </a:p>
           <a:p>
             <a:pPr lvl="1"/>
             <a:r>
-              <a:rPr lang="en-US" smtClean="0"/>
+              <a:rPr lang="en-US"/>
               <a:t>Second level</a:t>
             </a:r>
           </a:p>
           <a:p>
             <a:pPr lvl="2"/>
             <a:r>
-              <a:rPr lang="en-US" smtClean="0"/>
+              <a:rPr lang="en-US"/>
               <a:t>Third level</a:t>
             </a:r>
           </a:p>
           <a:p>
             <a:pPr lvl="3"/>
             <a:r>
-              <a:rPr lang="en-US" smtClean="0"/>
+              <a:rPr lang="en-US"/>
               <a:t>Fourth level</a:t>
             </a:r>
           </a:p>
           <a:p>
             <a:pPr lvl="4"/>
             <a:r>
-              <a:rPr lang="en-US" smtClean="0"/>
+              <a:rPr lang="en-US"/>
               <a:t>Fifth level</a:t>
             </a:r>
-            <a:endParaRPr lang="en-US"/>
           </a:p>
         </p:txBody>
       </p:sp>
@@ -821,7 +829,7 @@
           <a:p>
             <a:fld id="{5BCAD085-E8A6-8845-BD4E-CB4CCA059FC4}" type="datetimeFigureOut">
               <a:rPr lang="en-US" smtClean="0"/>
-              <a:t>1/27/13</a:t>
+              <a:t>8/20/26</a:t>
             </a:fld>
             <a:endParaRPr lang="en-US"/>
           </a:p>
@@ -924,10 +932,9 @@
           </a:lstStyle>
           <a:p>
             <a:r>
-              <a:rPr lang="en-US" smtClean="0"/>
+              <a:rPr lang="en-US"/>
               <a:t>Click to edit Master title style</a:t>
             </a:r>
-            <a:endParaRPr lang="en-US"/>
           </a:p>
         </p:txBody>
       </p:sp>
@@ -1044,7 +1051,7 @@
           <a:p>
             <a:pPr lvl="0"/>
             <a:r>
-              <a:rPr lang="en-US" smtClean="0"/>
+              <a:rPr lang="en-US"/>
               <a:t>Click to edit Master text styles</a:t>
             </a:r>
           </a:p>
@@ -1067,7 +1074,7 @@
           <a:p>
             <a:fld id="{5BCAD085-E8A6-8845-BD4E-CB4CCA059FC4}" type="datetimeFigureOut">
               <a:rPr lang="en-US" smtClean="0"/>
-              <a:t>1/27/13</a:t>
+              <a:t>8/20/26</a:t>
             </a:fld>
             <a:endParaRPr lang="en-US"/>
           </a:p>
@@ -1161,10 +1168,9 @@
           <a:lstStyle/>
           <a:p>
             <a:r>
-              <a:rPr lang="en-US" smtClean="0"/>
+              <a:rPr lang="en-US"/>
               <a:t>Click to edit Master title style</a:t>
             </a:r>
-            <a:endParaRPr lang="en-US"/>
           </a:p>
         </p:txBody>
       </p:sp>
@@ -1218,38 +1224,37 @@
           <a:p>
             <a:pPr lvl="0"/>
             <a:r>
-              <a:rPr lang="en-US" smtClean="0"/>
+              <a:rPr lang="en-US"/>
               <a:t>Click to edit Master text styles</a:t>
             </a:r>
           </a:p>
           <a:p>
             <a:pPr lvl="1"/>
             <a:r>
-              <a:rPr lang="en-US" smtClean="0"/>
+              <a:rPr lang="en-US"/>
               <a:t>Second level</a:t>
             </a:r>
           </a:p>
           <a:p>
             <a:pPr lvl="2"/>
             <a:r>
-              <a:rPr lang="en-US" smtClean="0"/>
+              <a:rPr lang="en-US"/>
               <a:t>Third level</a:t>
             </a:r>
           </a:p>
           <a:p>
             <a:pPr lvl="3"/>
             <a:r>
-              <a:rPr lang="en-US" smtClean="0"/>
+              <a:rPr lang="en-US"/>
               <a:t>Fourth level</a:t>
             </a:r>
           </a:p>
           <a:p>
             <a:pPr lvl="4"/>
             <a:r>
-              <a:rPr lang="en-US" smtClean="0"/>
+              <a:rPr lang="en-US"/>
               <a:t>Fifth level</a:t>
             </a:r>
-            <a:endParaRPr lang="en-US"/>
           </a:p>
         </p:txBody>
       </p:sp>
@@ -1303,38 +1308,37 @@
           <a:p>
             <a:pPr lvl="0"/>
             <a:r>
-              <a:rPr lang="en-US" smtClean="0"/>
+              <a:rPr lang="en-US"/>
               <a:t>Click to edit Master text styles</a:t>
             </a:r>
           </a:p>
           <a:p>
             <a:pPr lvl="1"/>
             <a:r>
-              <a:rPr lang="en-US" smtClean="0"/>
+              <a:rPr lang="en-US"/>
               <a:t>Second level</a:t>
             </a:r>
           </a:p>
           <a:p>
             <a:pPr lvl="2"/>
             <a:r>
-              <a:rPr lang="en-US" smtClean="0"/>
+              <a:rPr lang="en-US"/>
               <a:t>Third level</a:t>
             </a:r>
           </a:p>
           <a:p>
             <a:pPr lvl="3"/>
             <a:r>
-              <a:rPr lang="en-US" smtClean="0"/>
+              <a:rPr lang="en-US"/>
               <a:t>Fourth level</a:t>
             </a:r>
           </a:p>
           <a:p>
             <a:pPr lvl="4"/>
             <a:r>
-              <a:rPr lang="en-US" smtClean="0"/>
+              <a:rPr lang="en-US"/>
               <a:t>Fifth level</a:t>
             </a:r>
-            <a:endParaRPr lang="en-US"/>
           </a:p>
         </p:txBody>
       </p:sp>
@@ -1355,7 +1359,7 @@
           <a:p>
             <a:fld id="{5BCAD085-E8A6-8845-BD4E-CB4CCA059FC4}" type="datetimeFigureOut">
               <a:rPr lang="en-US" smtClean="0"/>
-              <a:t>1/27/13</a:t>
+              <a:t>8/20/26</a:t>
             </a:fld>
             <a:endParaRPr lang="en-US"/>
           </a:p>
@@ -1453,10 +1457,9 @@
           </a:lstStyle>
           <a:p>
             <a:r>
-              <a:rPr lang="en-US" smtClean="0"/>
+              <a:rPr lang="en-US"/>
               <a:t>Click to edit Master title style</a:t>
             </a:r>
-            <a:endParaRPr lang="en-US"/>
           </a:p>
         </p:txBody>
       </p:sp>
@@ -1519,7 +1522,7 @@
           <a:p>
             <a:pPr lvl="0"/>
             <a:r>
-              <a:rPr lang="en-US" smtClean="0"/>
+              <a:rPr lang="en-US"/>
               <a:t>Click to edit Master text styles</a:t>
             </a:r>
           </a:p>
@@ -1575,38 +1578,37 @@
           <a:p>
             <a:pPr lvl="0"/>
             <a:r>
-              <a:rPr lang="en-US" smtClean="0"/>
+              <a:rPr lang="en-US"/>
               <a:t>Click to edit Master text styles</a:t>
             </a:r>
           </a:p>
           <a:p>
             <a:pPr lvl="1"/>
             <a:r>
-              <a:rPr lang="en-US" smtClean="0"/>
+              <a:rPr lang="en-US"/>
               <a:t>Second level</a:t>
             </a:r>
           </a:p>
           <a:p>
             <a:pPr lvl="2"/>
             <a:r>
-              <a:rPr lang="en-US" smtClean="0"/>
+              <a:rPr lang="en-US"/>
               <a:t>Third level</a:t>
             </a:r>
           </a:p>
           <a:p>
             <a:pPr lvl="3"/>
             <a:r>
-              <a:rPr lang="en-US" smtClean="0"/>
+              <a:rPr lang="en-US"/>
               <a:t>Fourth level</a:t>
             </a:r>
           </a:p>
           <a:p>
             <a:pPr lvl="4"/>
             <a:r>
-              <a:rPr lang="en-US" smtClean="0"/>
+              <a:rPr lang="en-US"/>
               <a:t>Fifth level</a:t>
             </a:r>
-            <a:endParaRPr lang="en-US"/>
           </a:p>
         </p:txBody>
       </p:sp>
@@ -1669,7 +1671,7 @@
           <a:p>
             <a:pPr lvl="0"/>
             <a:r>
-              <a:rPr lang="en-US" smtClean="0"/>
+              <a:rPr lang="en-US"/>
               <a:t>Click to edit Master text styles</a:t>
             </a:r>
           </a:p>
@@ -1725,38 +1727,37 @@
           <a:p>
             <a:pPr lvl="0"/>
             <a:r>
-              <a:rPr lang="en-US" smtClean="0"/>
+              <a:rPr lang="en-US"/>
               <a:t>Click to edit Master text styles</a:t>
             </a:r>
           </a:p>
           <a:p>
             <a:pPr lvl="1"/>
             <a:r>
-              <a:rPr lang="en-US" smtClean="0"/>
+              <a:rPr lang="en-US"/>
               <a:t>Second level</a:t>
             </a:r>
           </a:p>
           <a:p>
             <a:pPr lvl="2"/>
             <a:r>
-              <a:rPr lang="en-US" smtClean="0"/>
+              <a:rPr lang="en-US"/>
               <a:t>Third level</a:t>
             </a:r>
           </a:p>
           <a:p>
             <a:pPr lvl="3"/>
             <a:r>
-              <a:rPr lang="en-US" smtClean="0"/>
+              <a:rPr lang="en-US"/>
               <a:t>Fourth level</a:t>
             </a:r>
           </a:p>
           <a:p>
             <a:pPr lvl="4"/>
             <a:r>
-              <a:rPr lang="en-US" smtClean="0"/>
+              <a:rPr lang="en-US"/>
               <a:t>Fifth level</a:t>
             </a:r>
-            <a:endParaRPr lang="en-US"/>
           </a:p>
         </p:txBody>
       </p:sp>
@@ -1777,7 +1778,7 @@
           <a:p>
             <a:fld id="{5BCAD085-E8A6-8845-BD4E-CB4CCA059FC4}" type="datetimeFigureOut">
               <a:rPr lang="en-US" smtClean="0"/>
-              <a:t>1/27/13</a:t>
+              <a:t>8/20/26</a:t>
             </a:fld>
             <a:endParaRPr lang="en-US"/>
           </a:p>
@@ -1871,10 +1872,9 @@
           <a:lstStyle/>
           <a:p>
             <a:r>
-              <a:rPr lang="en-US" smtClean="0"/>
+              <a:rPr lang="en-US"/>
               <a:t>Click to edit Master title style</a:t>
             </a:r>
-            <a:endParaRPr lang="en-US"/>
           </a:p>
         </p:txBody>
       </p:sp>
@@ -1895,7 +1895,7 @@
           <a:p>
             <a:fld id="{5BCAD085-E8A6-8845-BD4E-CB4CCA059FC4}" type="datetimeFigureOut">
               <a:rPr lang="en-US" smtClean="0"/>
-              <a:t>1/27/13</a:t>
+              <a:t>8/20/26</a:t>
             </a:fld>
             <a:endParaRPr lang="en-US"/>
           </a:p>
@@ -1990,7 +1990,7 @@
           <a:p>
             <a:fld id="{5BCAD085-E8A6-8845-BD4E-CB4CCA059FC4}" type="datetimeFigureOut">
               <a:rPr lang="en-US" smtClean="0"/>
-              <a:t>1/27/13</a:t>
+              <a:t>8/20/26</a:t>
             </a:fld>
             <a:endParaRPr lang="en-US"/>
           </a:p>
@@ -2093,10 +2093,9 @@
           </a:lstStyle>
           <a:p>
             <a:r>
-              <a:rPr lang="en-US" smtClean="0"/>
+              <a:rPr lang="en-US"/>
               <a:t>Click to edit Master title style</a:t>
             </a:r>
-            <a:endParaRPr lang="en-US"/>
           </a:p>
         </p:txBody>
       </p:sp>
@@ -2150,38 +2149,37 @@
           <a:p>
             <a:pPr lvl="0"/>
             <a:r>
-              <a:rPr lang="en-US" smtClean="0"/>
+              <a:rPr lang="en-US"/>
               <a:t>Click to edit Master text styles</a:t>
             </a:r>
           </a:p>
           <a:p>
             <a:pPr lvl="1"/>
             <a:r>
-              <a:rPr lang="en-US" smtClean="0"/>
+              <a:rPr lang="en-US"/>
               <a:t>Second level</a:t>
             </a:r>
           </a:p>
           <a:p>
             <a:pPr lvl="2"/>
             <a:r>
-              <a:rPr lang="en-US" smtClean="0"/>
+              <a:rPr lang="en-US"/>
               <a:t>Third level</a:t>
             </a:r>
           </a:p>
           <a:p>
             <a:pPr lvl="3"/>
             <a:r>
-              <a:rPr lang="en-US" smtClean="0"/>
+              <a:rPr lang="en-US"/>
               <a:t>Fourth level</a:t>
             </a:r>
           </a:p>
           <a:p>
             <a:pPr lvl="4"/>
             <a:r>
-              <a:rPr lang="en-US" smtClean="0"/>
+              <a:rPr lang="en-US"/>
               <a:t>Fifth level</a:t>
             </a:r>
-            <a:endParaRPr lang="en-US"/>
           </a:p>
         </p:txBody>
       </p:sp>
@@ -2244,7 +2242,7 @@
           <a:p>
             <a:pPr lvl="0"/>
             <a:r>
-              <a:rPr lang="en-US" smtClean="0"/>
+              <a:rPr lang="en-US"/>
               <a:t>Click to edit Master text styles</a:t>
             </a:r>
           </a:p>
@@ -2267,7 +2265,7 @@
           <a:p>
             <a:fld id="{5BCAD085-E8A6-8845-BD4E-CB4CCA059FC4}" type="datetimeFigureOut">
               <a:rPr lang="en-US" smtClean="0"/>
-              <a:t>1/27/13</a:t>
+              <a:t>8/20/26</a:t>
             </a:fld>
             <a:endParaRPr lang="en-US"/>
           </a:p>
@@ -2370,10 +2368,9 @@
           </a:lstStyle>
           <a:p>
             <a:r>
-              <a:rPr lang="en-US" smtClean="0"/>
+              <a:rPr lang="en-US"/>
               <a:t>Click to edit Master title style</a:t>
             </a:r>
-            <a:endParaRPr lang="en-US"/>
           </a:p>
         </p:txBody>
       </p:sp>
@@ -2497,7 +2494,7 @@
           <a:p>
             <a:pPr lvl="0"/>
             <a:r>
-              <a:rPr lang="en-US" smtClean="0"/>
+              <a:rPr lang="en-US"/>
               <a:t>Click to edit Master text styles</a:t>
             </a:r>
           </a:p>
@@ -2520,7 +2517,7 @@
           <a:p>
             <a:fld id="{5BCAD085-E8A6-8845-BD4E-CB4CCA059FC4}" type="datetimeFigureOut">
               <a:rPr lang="en-US" smtClean="0"/>
-              <a:t>1/27/13</a:t>
+              <a:t>8/20/26</a:t>
             </a:fld>
             <a:endParaRPr lang="en-US"/>
           </a:p>
@@ -2629,10 +2626,9 @@
           <a:lstStyle/>
           <a:p>
             <a:r>
-              <a:rPr lang="en-US" smtClean="0"/>
+              <a:rPr lang="en-US"/>
               <a:t>Click to edit Master title style</a:t>
             </a:r>
-            <a:endParaRPr lang="en-US"/>
           </a:p>
         </p:txBody>
       </p:sp>
@@ -2663,38 +2659,37 @@
           <a:p>
             <a:pPr lvl="0"/>
             <a:r>
-              <a:rPr lang="en-US" smtClean="0"/>
+              <a:rPr lang="en-US"/>
               <a:t>Click to edit Master text styles</a:t>
             </a:r>
           </a:p>
           <a:p>
             <a:pPr lvl="1"/>
             <a:r>
-              <a:rPr lang="en-US" smtClean="0"/>
+              <a:rPr lang="en-US"/>
               <a:t>Second level</a:t>
             </a:r>
           </a:p>
           <a:p>
             <a:pPr lvl="2"/>
             <a:r>
-              <a:rPr lang="en-US" smtClean="0"/>
+              <a:rPr lang="en-US"/>
               <a:t>Third level</a:t>
             </a:r>
           </a:p>
           <a:p>
             <a:pPr lvl="3"/>
             <a:r>
-              <a:rPr lang="en-US" smtClean="0"/>
+              <a:rPr lang="en-US"/>
               <a:t>Fourth level</a:t>
             </a:r>
           </a:p>
           <a:p>
             <a:pPr lvl="4"/>
             <a:r>
-              <a:rPr lang="en-US" smtClean="0"/>
+              <a:rPr lang="en-US"/>
               <a:t>Fifth level</a:t>
             </a:r>
-            <a:endParaRPr lang="en-US"/>
           </a:p>
         </p:txBody>
       </p:sp>
@@ -2733,7 +2728,7 @@
           <a:p>
             <a:fld id="{5BCAD085-E8A6-8845-BD4E-CB4CCA059FC4}" type="datetimeFigureOut">
               <a:rPr lang="en-US" smtClean="0"/>
-              <a:t>1/27/13</a:t>
+              <a:t>8/20/26</a:t>
             </a:fld>
             <a:endParaRPr lang="en-US"/>
           </a:p>
@@ -3092,7 +3087,7 @@
 </file>
 
 <file path=ppt/slides/slide1.xml><?xml version="1.0" encoding="utf-8"?>
-<p:sld xmlns:a="http://schemas.openxmlformats.org/drawingml/2006/main" xmlns:p="http://schemas.openxmlformats.org/presentationml/2006/main" xmlns:r="http://schemas.openxmlformats.org/officeDocument/2006/relationships">
+<p:sld xmlns:a="http://schemas.openxmlformats.org/drawingml/2006/main" xmlns:r="http://schemas.openxmlformats.org/officeDocument/2006/relationships" xmlns:p="http://schemas.openxmlformats.org/presentationml/2006/main">
   <p:cSld>
     <p:spTree>
       <p:nvGrpSpPr>
@@ -3100,7 +3095,14 @@
         <p:cNvGrpSpPr/>
         <p:nvPr/>
       </p:nvGrpSpPr>
-      <p:grpSpPr/>
+      <p:grpSpPr>
+        <a:xfrm>
+          <a:off x="0" y="0"/>
+          <a:ext cx="0" cy="0"/>
+          <a:chOff x="0" y="0"/>
+          <a:chExt cx="0" cy="0"/>
+        </a:xfrm>
+      </p:grpSpPr>
       <p:sp>
         <p:nvSpPr>
           <p:cNvPr id="2" name="Rectangle 1"/>
@@ -3142,6 +3144,7 @@
           <a:lstStyle/>
           <a:p>
             <a:pPr algn="ctr"/>
+            <a:endParaRPr/>
           </a:p>
         </p:txBody>
       </p:sp>
@@ -3186,6 +3189,7 @@
           <a:lstStyle/>
           <a:p>
             <a:pPr algn="ctr"/>
+            <a:endParaRPr/>
           </a:p>
         </p:txBody>
       </p:sp>
@@ -3230,6 +3234,7 @@
           <a:lstStyle/>
           <a:p>
             <a:pPr algn="ctr"/>
+            <a:endParaRPr/>
           </a:p>
         </p:txBody>
       </p:sp>
@@ -3254,13 +3259,6 @@
             <a:noFill/>
           </a:ln>
           <a:effectLst/>
-          <a:effectLst>
-            <a:outerShdw blurRad="60000" dist="25000" dir="5400000" rotWithShape="0">
-              <a:srgbClr val="1A1A2E">
-                <a:alpha val="22000"/>
-              </a:srgbClr>
-            </a:outerShdw>
-          </a:effectLst>
         </p:spPr>
         <p:style>
           <a:lnRef idx="1">
@@ -3281,6 +3279,7 @@
           <a:lstStyle/>
           <a:p>
             <a:pPr algn="ctr"/>
+            <a:endParaRPr/>
           </a:p>
         </p:txBody>
       </p:sp>
@@ -3325,6 +3324,7 @@
           <a:lstStyle/>
           <a:p>
             <a:pPr algn="ctr"/>
+            <a:endParaRPr/>
           </a:p>
         </p:txBody>
       </p:sp>
@@ -3345,7 +3345,7 @@
           <a:noFill/>
         </p:spPr>
         <p:txBody>
-          <a:bodyPr wrap="square" anchor="ctr" lIns="109728" rIns="109728" tIns="54864" bIns="54864">
+          <a:bodyPr wrap="square" lIns="109728" tIns="54864" rIns="109728" bIns="54864" anchor="ctr">
             <a:spAutoFit/>
           </a:bodyPr>
           <a:lstStyle/>
@@ -3406,7 +3406,7 @@
           <a:noFill/>
         </p:spPr>
         <p:txBody>
-          <a:bodyPr wrap="square" anchor="t" lIns="109728" rIns="109728" tIns="54864" bIns="54864">
+          <a:bodyPr wrap="square" lIns="109728" tIns="54864" rIns="109728" bIns="54864" anchor="t">
             <a:spAutoFit/>
           </a:bodyPr>
           <a:lstStyle/>
@@ -3448,7 +3448,7 @@
           <a:noFill/>
         </p:spPr>
         <p:txBody>
-          <a:bodyPr wrap="square" anchor="t" lIns="109728" rIns="109728" tIns="54864" bIns="54864">
+          <a:bodyPr wrap="square" lIns="109728" tIns="54864" rIns="109728" bIns="54864" anchor="t">
             <a:spAutoFit/>
           </a:bodyPr>
           <a:lstStyle/>
@@ -3490,7 +3490,7 @@
           <a:noFill/>
         </p:spPr>
         <p:txBody>
-          <a:bodyPr wrap="square" anchor="t" lIns="109728" rIns="109728" tIns="54864" bIns="54864">
+          <a:bodyPr wrap="square" lIns="109728" tIns="54864" rIns="109728" bIns="54864" anchor="t">
             <a:spAutoFit/>
           </a:bodyPr>
           <a:lstStyle/>
@@ -3532,7 +3532,7 @@
           <a:noFill/>
         </p:spPr>
         <p:txBody>
-          <a:bodyPr wrap="square" anchor="t" lIns="109728" rIns="109728" tIns="54864" bIns="54864">
+          <a:bodyPr wrap="square" lIns="109728" tIns="54864" rIns="109728" bIns="54864" anchor="t">
             <a:spAutoFit/>
           </a:bodyPr>
           <a:lstStyle/>
@@ -3596,7 +3596,7 @@
           </a:fontRef>
         </p:style>
         <p:txBody>
-          <a:bodyPr rtlCol="0" anchor="ctr" wrap="square" lIns="109728" rIns="109728" tIns="54864" bIns="54864"/>
+          <a:bodyPr wrap="square" lIns="109728" tIns="54864" rIns="109728" bIns="54864" rtlCol="0" anchor="ctr"/>
           <a:lstStyle/>
           <a:p>
             <a:pPr algn="ctr">
@@ -3658,7 +3658,7 @@
           </a:fontRef>
         </p:style>
         <p:txBody>
-          <a:bodyPr rtlCol="0" anchor="ctr" wrap="square" lIns="109728" rIns="109728" tIns="54864" bIns="54864"/>
+          <a:bodyPr wrap="square" lIns="109728" tIns="54864" rIns="109728" bIns="54864" rtlCol="0" anchor="ctr"/>
           <a:lstStyle/>
           <a:p>
             <a:pPr algn="ctr">
@@ -3720,7 +3720,7 @@
           </a:fontRef>
         </p:style>
         <p:txBody>
-          <a:bodyPr rtlCol="0" anchor="ctr" wrap="square" lIns="109728" rIns="109728" tIns="54864" bIns="54864"/>
+          <a:bodyPr wrap="square" lIns="109728" tIns="54864" rIns="109728" bIns="54864" rtlCol="0" anchor="ctr"/>
           <a:lstStyle/>
           <a:p>
             <a:pPr algn="ctr">
@@ -3760,7 +3760,7 @@
           <a:noFill/>
         </p:spPr>
         <p:txBody>
-          <a:bodyPr wrap="square" anchor="t" lIns="109728" rIns="109728" tIns="54864" bIns="54864">
+          <a:bodyPr wrap="square" lIns="109728" tIns="54864" rIns="109728" bIns="54864" anchor="t">
             <a:spAutoFit/>
           </a:bodyPr>
           <a:lstStyle/>
@@ -3785,6 +3785,36 @@
           </a:p>
         </p:txBody>
       </p:sp>
+      <p:pic>
+        <p:nvPicPr>
+          <p:cNvPr id="16" name="Picture 15" descr="Evolve Security 2026 Company Profile: Valuation, Funding &amp; Investors |  PitchBook">
+            <a:extLst>
+              <a:ext uri="{FF2B5EF4-FFF2-40B4-BE49-F238E27FC236}">
+                <a16:creationId xmlns:a16="http://schemas.microsoft.com/office/drawing/2014/main" id="{BBD26689-0B4E-D240-46B6-8A02670D67EF}"/>
+              </a:ext>
+            </a:extLst>
+          </p:cNvPr>
+          <p:cNvPicPr>
+            <a:picLocks noChangeAspect="1"/>
+          </p:cNvPicPr>
+          <p:nvPr/>
+        </p:nvPicPr>
+        <p:blipFill>
+          <a:blip r:embed="rId2"/>
+          <a:stretch>
+            <a:fillRect/>
+          </a:stretch>
+        </p:blipFill>
+        <p:spPr>
+          <a:xfrm>
+            <a:off x="3927856" y="-320358"/>
+            <a:ext cx="1787144" cy="1787144"/>
+          </a:xfrm>
+          <a:prstGeom prst="rect">
+            <a:avLst/>
+          </a:prstGeom>
+        </p:spPr>
+      </p:pic>
     </p:spTree>
   </p:cSld>
   <p:clrMapOvr>
@@ -3794,7 +3824,7 @@
 </file>
 
 <file path=ppt/slides/slide10.xml><?xml version="1.0" encoding="utf-8"?>
-<p:sld xmlns:a="http://schemas.openxmlformats.org/drawingml/2006/main" xmlns:p="http://schemas.openxmlformats.org/presentationml/2006/main" xmlns:r="http://schemas.openxmlformats.org/officeDocument/2006/relationships">
+<p:sld xmlns:a="http://schemas.openxmlformats.org/drawingml/2006/main" xmlns:r="http://schemas.openxmlformats.org/officeDocument/2006/relationships" xmlns:p="http://schemas.openxmlformats.org/presentationml/2006/main">
   <p:cSld>
     <p:spTree>
       <p:nvGrpSpPr>
@@ -3802,7 +3832,14 @@
         <p:cNvGrpSpPr/>
         <p:nvPr/>
       </p:nvGrpSpPr>
-      <p:grpSpPr/>
+      <p:grpSpPr>
+        <a:xfrm>
+          <a:off x="0" y="0"/>
+          <a:ext cx="0" cy="0"/>
+          <a:chOff x="0" y="0"/>
+          <a:chExt cx="0" cy="0"/>
+        </a:xfrm>
+      </p:grpSpPr>
       <p:sp>
         <p:nvSpPr>
           <p:cNvPr id="2" name="Rectangle 1"/>
@@ -3844,6 +3881,7 @@
           <a:lstStyle/>
           <a:p>
             <a:pPr algn="ctr"/>
+            <a:endParaRPr/>
           </a:p>
         </p:txBody>
       </p:sp>
@@ -3888,6 +3926,7 @@
           <a:lstStyle/>
           <a:p>
             <a:pPr algn="ctr"/>
+            <a:endParaRPr/>
           </a:p>
         </p:txBody>
       </p:sp>
@@ -3908,7 +3947,7 @@
           <a:noFill/>
         </p:spPr>
         <p:txBody>
-          <a:bodyPr wrap="square" anchor="t" lIns="109728" rIns="109728" tIns="54864" bIns="54864">
+          <a:bodyPr wrap="square" lIns="109728" tIns="54864" rIns="109728" bIns="54864" anchor="t">
             <a:spAutoFit/>
           </a:bodyPr>
           <a:lstStyle/>
@@ -3950,7 +3989,7 @@
           <a:noFill/>
         </p:spPr>
         <p:txBody>
-          <a:bodyPr wrap="square" anchor="ctr" lIns="109728" rIns="109728" tIns="54864" bIns="54864">
+          <a:bodyPr wrap="square" lIns="109728" tIns="54864" rIns="109728" bIns="54864" anchor="ctr">
             <a:spAutoFit/>
           </a:bodyPr>
           <a:lstStyle/>
@@ -4016,6 +4055,7 @@
           <a:lstStyle/>
           <a:p>
             <a:pPr algn="ctr"/>
+            <a:endParaRPr/>
           </a:p>
         </p:txBody>
       </p:sp>
@@ -4036,7 +4076,7 @@
           <a:noFill/>
         </p:spPr>
         <p:txBody>
-          <a:bodyPr wrap="square" anchor="ctr" lIns="109728" rIns="109728" tIns="54864" bIns="54864">
+          <a:bodyPr wrap="square" lIns="109728" tIns="54864" rIns="109728" bIns="54864" anchor="ctr">
             <a:spAutoFit/>
           </a:bodyPr>
           <a:lstStyle/>
@@ -4078,7 +4118,7 @@
           <a:noFill/>
         </p:spPr>
         <p:txBody>
-          <a:bodyPr wrap="square" anchor="ctr" lIns="109728" rIns="109728" tIns="54864" bIns="54864">
+          <a:bodyPr wrap="square" lIns="109728" tIns="54864" rIns="109728" bIns="54864" anchor="ctr">
             <a:spAutoFit/>
           </a:bodyPr>
           <a:lstStyle/>
@@ -4124,13 +4164,6 @@
             <a:noFill/>
           </a:ln>
           <a:effectLst/>
-          <a:effectLst>
-            <a:outerShdw blurRad="60000" dist="25000" dir="5400000" rotWithShape="0">
-              <a:srgbClr val="1A1A2E">
-                <a:alpha val="22000"/>
-              </a:srgbClr>
-            </a:outerShdw>
-          </a:effectLst>
         </p:spPr>
         <p:style>
           <a:lnRef idx="1">
@@ -4151,6 +4184,7 @@
           <a:lstStyle/>
           <a:p>
             <a:pPr algn="ctr"/>
+            <a:endParaRPr/>
           </a:p>
         </p:txBody>
       </p:sp>
@@ -4171,7 +4205,7 @@
           <a:noFill/>
         </p:spPr>
         <p:txBody>
-          <a:bodyPr wrap="square" anchor="ctr" lIns="109728" rIns="109728" tIns="54864" bIns="54864">
+          <a:bodyPr wrap="square" lIns="109728" tIns="54864" rIns="109728" bIns="54864" anchor="ctr">
             <a:spAutoFit/>
           </a:bodyPr>
           <a:lstStyle/>
@@ -4236,13 +4270,6 @@
             <a:noFill/>
           </a:ln>
           <a:effectLst/>
-          <a:effectLst>
-            <a:outerShdw blurRad="60000" dist="25000" dir="5400000" rotWithShape="0">
-              <a:srgbClr val="1A1A2E">
-                <a:alpha val="22000"/>
-              </a:srgbClr>
-            </a:outerShdw>
-          </a:effectLst>
         </p:spPr>
         <p:style>
           <a:lnRef idx="1">
@@ -4263,6 +4290,7 @@
           <a:lstStyle/>
           <a:p>
             <a:pPr algn="ctr"/>
+            <a:endParaRPr/>
           </a:p>
         </p:txBody>
       </p:sp>
@@ -4283,7 +4311,7 @@
           <a:noFill/>
         </p:spPr>
         <p:txBody>
-          <a:bodyPr wrap="square" anchor="ctr" lIns="109728" rIns="109728" tIns="54864" bIns="54864">
+          <a:bodyPr wrap="square" lIns="109728" tIns="54864" rIns="109728" bIns="54864" anchor="ctr">
             <a:spAutoFit/>
           </a:bodyPr>
           <a:lstStyle/>
@@ -4348,13 +4376,6 @@
             <a:noFill/>
           </a:ln>
           <a:effectLst/>
-          <a:effectLst>
-            <a:outerShdw blurRad="60000" dist="25000" dir="5400000" rotWithShape="0">
-              <a:srgbClr val="1A1A2E">
-                <a:alpha val="22000"/>
-              </a:srgbClr>
-            </a:outerShdw>
-          </a:effectLst>
         </p:spPr>
         <p:style>
           <a:lnRef idx="1">
@@ -4375,6 +4396,7 @@
           <a:lstStyle/>
           <a:p>
             <a:pPr algn="ctr"/>
+            <a:endParaRPr/>
           </a:p>
         </p:txBody>
       </p:sp>
@@ -4395,7 +4417,7 @@
           <a:noFill/>
         </p:spPr>
         <p:txBody>
-          <a:bodyPr wrap="square" anchor="ctr" lIns="109728" rIns="109728" tIns="54864" bIns="54864">
+          <a:bodyPr wrap="square" lIns="109728" tIns="54864" rIns="109728" bIns="54864" anchor="ctr">
             <a:spAutoFit/>
           </a:bodyPr>
           <a:lstStyle/>
@@ -4456,7 +4478,7 @@
           <a:noFill/>
         </p:spPr>
         <p:txBody>
-          <a:bodyPr wrap="square" anchor="t" lIns="109728" rIns="109728" tIns="54864" bIns="54864">
+          <a:bodyPr wrap="square" lIns="109728" tIns="54864" rIns="109728" bIns="54864" anchor="t">
             <a:spAutoFit/>
           </a:bodyPr>
           <a:lstStyle/>
@@ -4490,7 +4512,7 @@
 </file>
 
 <file path=ppt/slides/slide11.xml><?xml version="1.0" encoding="utf-8"?>
-<p:sld xmlns:a="http://schemas.openxmlformats.org/drawingml/2006/main" xmlns:p="http://schemas.openxmlformats.org/presentationml/2006/main" xmlns:r="http://schemas.openxmlformats.org/officeDocument/2006/relationships">
+<p:sld xmlns:a="http://schemas.openxmlformats.org/drawingml/2006/main" xmlns:r="http://schemas.openxmlformats.org/officeDocument/2006/relationships" xmlns:p="http://schemas.openxmlformats.org/presentationml/2006/main">
   <p:cSld>
     <p:spTree>
       <p:nvGrpSpPr>
@@ -4498,7 +4520,14 @@
         <p:cNvGrpSpPr/>
         <p:nvPr/>
       </p:nvGrpSpPr>
-      <p:grpSpPr/>
+      <p:grpSpPr>
+        <a:xfrm>
+          <a:off x="0" y="0"/>
+          <a:ext cx="0" cy="0"/>
+          <a:chOff x="0" y="0"/>
+          <a:chExt cx="0" cy="0"/>
+        </a:xfrm>
+      </p:grpSpPr>
       <p:sp>
         <p:nvSpPr>
           <p:cNvPr id="2" name="Rectangle 1"/>
@@ -4540,6 +4569,7 @@
           <a:lstStyle/>
           <a:p>
             <a:pPr algn="ctr"/>
+            <a:endParaRPr/>
           </a:p>
         </p:txBody>
       </p:sp>
@@ -4584,6 +4614,7 @@
           <a:lstStyle/>
           <a:p>
             <a:pPr algn="ctr"/>
+            <a:endParaRPr/>
           </a:p>
         </p:txBody>
       </p:sp>
@@ -4604,7 +4635,7 @@
           <a:noFill/>
         </p:spPr>
         <p:txBody>
-          <a:bodyPr wrap="square" anchor="t" lIns="109728" rIns="109728" tIns="54864" bIns="54864">
+          <a:bodyPr wrap="square" lIns="109728" tIns="54864" rIns="109728" bIns="54864" anchor="t">
             <a:spAutoFit/>
           </a:bodyPr>
           <a:lstStyle/>
@@ -4646,7 +4677,7 @@
           <a:noFill/>
         </p:spPr>
         <p:txBody>
-          <a:bodyPr wrap="square" anchor="ctr" lIns="109728" rIns="109728" tIns="54864" bIns="54864">
+          <a:bodyPr wrap="square" lIns="109728" tIns="54864" rIns="109728" bIns="54864" anchor="ctr">
             <a:spAutoFit/>
           </a:bodyPr>
           <a:lstStyle/>
@@ -4712,6 +4743,7 @@
           <a:lstStyle/>
           <a:p>
             <a:pPr algn="ctr"/>
+            <a:endParaRPr/>
           </a:p>
         </p:txBody>
       </p:sp>
@@ -4732,7 +4764,7 @@
           <a:noFill/>
         </p:spPr>
         <p:txBody>
-          <a:bodyPr wrap="square" anchor="ctr" lIns="109728" rIns="109728" tIns="54864" bIns="54864">
+          <a:bodyPr wrap="square" lIns="109728" tIns="54864" rIns="109728" bIns="54864" anchor="ctr">
             <a:spAutoFit/>
           </a:bodyPr>
           <a:lstStyle/>
@@ -4774,7 +4806,7 @@
           <a:noFill/>
         </p:spPr>
         <p:txBody>
-          <a:bodyPr wrap="square" anchor="ctr" lIns="109728" rIns="109728" tIns="54864" bIns="54864">
+          <a:bodyPr wrap="square" lIns="109728" tIns="54864" rIns="109728" bIns="54864" anchor="ctr">
             <a:spAutoFit/>
           </a:bodyPr>
           <a:lstStyle/>
@@ -4824,13 +4856,6 @@
             </a:solidFill>
           </a:ln>
           <a:effectLst/>
-          <a:effectLst>
-            <a:outerShdw blurRad="60000" dist="25000" dir="5400000" rotWithShape="0">
-              <a:srgbClr val="1A1A2E">
-                <a:alpha val="22000"/>
-              </a:srgbClr>
-            </a:outerShdw>
-          </a:effectLst>
         </p:spPr>
         <p:style>
           <a:lnRef idx="1">
@@ -4851,6 +4876,7 @@
           <a:lstStyle/>
           <a:p>
             <a:pPr algn="ctr"/>
+            <a:endParaRPr/>
           </a:p>
         </p:txBody>
       </p:sp>
@@ -4895,6 +4921,7 @@
           <a:lstStyle/>
           <a:p>
             <a:pPr algn="ctr"/>
+            <a:endParaRPr/>
           </a:p>
         </p:txBody>
       </p:sp>
@@ -4915,7 +4942,7 @@
           <a:noFill/>
         </p:spPr>
         <p:txBody>
-          <a:bodyPr wrap="square" anchor="t" lIns="109728" rIns="109728" tIns="54864" bIns="54864">
+          <a:bodyPr wrap="square" lIns="109728" tIns="54864" rIns="109728" bIns="54864" anchor="t">
             <a:spAutoFit/>
           </a:bodyPr>
           <a:lstStyle/>
@@ -4984,13 +5011,6 @@
             </a:solidFill>
           </a:ln>
           <a:effectLst/>
-          <a:effectLst>
-            <a:outerShdw blurRad="60000" dist="25000" dir="5400000" rotWithShape="0">
-              <a:srgbClr val="1A1A2E">
-                <a:alpha val="22000"/>
-              </a:srgbClr>
-            </a:outerShdw>
-          </a:effectLst>
         </p:spPr>
         <p:style>
           <a:lnRef idx="1">
@@ -5011,6 +5031,7 @@
           <a:lstStyle/>
           <a:p>
             <a:pPr algn="ctr"/>
+            <a:endParaRPr/>
           </a:p>
         </p:txBody>
       </p:sp>
@@ -5055,6 +5076,7 @@
           <a:lstStyle/>
           <a:p>
             <a:pPr algn="ctr"/>
+            <a:endParaRPr/>
           </a:p>
         </p:txBody>
       </p:sp>
@@ -5075,7 +5097,7 @@
           <a:noFill/>
         </p:spPr>
         <p:txBody>
-          <a:bodyPr wrap="square" anchor="t" lIns="109728" rIns="109728" tIns="54864" bIns="54864">
+          <a:bodyPr wrap="square" lIns="109728" tIns="54864" rIns="109728" bIns="54864" anchor="t">
             <a:spAutoFit/>
           </a:bodyPr>
           <a:lstStyle/>
@@ -5144,13 +5166,6 @@
             </a:solidFill>
           </a:ln>
           <a:effectLst/>
-          <a:effectLst>
-            <a:outerShdw blurRad="60000" dist="25000" dir="5400000" rotWithShape="0">
-              <a:srgbClr val="1A1A2E">
-                <a:alpha val="22000"/>
-              </a:srgbClr>
-            </a:outerShdw>
-          </a:effectLst>
         </p:spPr>
         <p:style>
           <a:lnRef idx="1">
@@ -5171,6 +5186,7 @@
           <a:lstStyle/>
           <a:p>
             <a:pPr algn="ctr"/>
+            <a:endParaRPr/>
           </a:p>
         </p:txBody>
       </p:sp>
@@ -5215,6 +5231,7 @@
           <a:lstStyle/>
           <a:p>
             <a:pPr algn="ctr"/>
+            <a:endParaRPr/>
           </a:p>
         </p:txBody>
       </p:sp>
@@ -5235,7 +5252,7 @@
           <a:noFill/>
         </p:spPr>
         <p:txBody>
-          <a:bodyPr wrap="square" anchor="t" lIns="109728" rIns="109728" tIns="54864" bIns="54864">
+          <a:bodyPr wrap="square" lIns="109728" tIns="54864" rIns="109728" bIns="54864" anchor="t">
             <a:spAutoFit/>
           </a:bodyPr>
           <a:lstStyle/>
@@ -5288,7 +5305,7 @@
 </file>
 
 <file path=ppt/slides/slide12.xml><?xml version="1.0" encoding="utf-8"?>
-<p:sld xmlns:a="http://schemas.openxmlformats.org/drawingml/2006/main" xmlns:p="http://schemas.openxmlformats.org/presentationml/2006/main" xmlns:r="http://schemas.openxmlformats.org/officeDocument/2006/relationships">
+<p:sld xmlns:a="http://schemas.openxmlformats.org/drawingml/2006/main" xmlns:r="http://schemas.openxmlformats.org/officeDocument/2006/relationships" xmlns:p="http://schemas.openxmlformats.org/presentationml/2006/main">
   <p:cSld>
     <p:spTree>
       <p:nvGrpSpPr>
@@ -5296,7 +5313,14 @@
         <p:cNvGrpSpPr/>
         <p:nvPr/>
       </p:nvGrpSpPr>
-      <p:grpSpPr/>
+      <p:grpSpPr>
+        <a:xfrm>
+          <a:off x="0" y="0"/>
+          <a:ext cx="0" cy="0"/>
+          <a:chOff x="0" y="0"/>
+          <a:chExt cx="0" cy="0"/>
+        </a:xfrm>
+      </p:grpSpPr>
       <p:sp>
         <p:nvSpPr>
           <p:cNvPr id="2" name="Rectangle 1"/>
@@ -5338,6 +5362,7 @@
           <a:lstStyle/>
           <a:p>
             <a:pPr algn="ctr"/>
+            <a:endParaRPr/>
           </a:p>
         </p:txBody>
       </p:sp>
@@ -5382,6 +5407,7 @@
           <a:lstStyle/>
           <a:p>
             <a:pPr algn="ctr"/>
+            <a:endParaRPr/>
           </a:p>
         </p:txBody>
       </p:sp>
@@ -5402,7 +5428,7 @@
           <a:noFill/>
         </p:spPr>
         <p:txBody>
-          <a:bodyPr wrap="square" anchor="t" lIns="109728" rIns="109728" tIns="54864" bIns="54864">
+          <a:bodyPr wrap="square" lIns="109728" tIns="54864" rIns="109728" bIns="54864" anchor="t">
             <a:spAutoFit/>
           </a:bodyPr>
           <a:lstStyle/>
@@ -5444,7 +5470,7 @@
           <a:noFill/>
         </p:spPr>
         <p:txBody>
-          <a:bodyPr wrap="square" anchor="ctr" lIns="109728" rIns="109728" tIns="54864" bIns="54864">
+          <a:bodyPr wrap="square" lIns="109728" tIns="54864" rIns="109728" bIns="54864" anchor="ctr">
             <a:spAutoFit/>
           </a:bodyPr>
           <a:lstStyle/>
@@ -5510,6 +5536,7 @@
           <a:lstStyle/>
           <a:p>
             <a:pPr algn="ctr"/>
+            <a:endParaRPr/>
           </a:p>
         </p:txBody>
       </p:sp>
@@ -5530,7 +5557,7 @@
           <a:noFill/>
         </p:spPr>
         <p:txBody>
-          <a:bodyPr wrap="square" anchor="ctr" lIns="109728" rIns="109728" tIns="54864" bIns="54864">
+          <a:bodyPr wrap="square" lIns="109728" tIns="54864" rIns="109728" bIns="54864" anchor="ctr">
             <a:spAutoFit/>
           </a:bodyPr>
           <a:lstStyle/>
@@ -5572,7 +5599,7 @@
           <a:noFill/>
         </p:spPr>
         <p:txBody>
-          <a:bodyPr wrap="square" anchor="ctr" lIns="109728" rIns="109728" tIns="54864" bIns="54864">
+          <a:bodyPr wrap="square" lIns="109728" tIns="54864" rIns="109728" bIns="54864" anchor="ctr">
             <a:spAutoFit/>
           </a:bodyPr>
           <a:lstStyle/>
@@ -5614,7 +5641,7 @@
           <a:noFill/>
         </p:spPr>
         <p:txBody>
-          <a:bodyPr wrap="square" anchor="t" lIns="109728" rIns="109728" tIns="54864" bIns="54864">
+          <a:bodyPr wrap="square" lIns="109728" tIns="54864" rIns="109728" bIns="54864" anchor="t">
             <a:spAutoFit/>
           </a:bodyPr>
           <a:lstStyle/>
@@ -5682,6 +5709,7 @@
           <a:lstStyle/>
           <a:p>
             <a:pPr algn="ctr"/>
+            <a:endParaRPr/>
           </a:p>
         </p:txBody>
       </p:sp>
@@ -5722,7 +5750,7 @@
           </a:fontRef>
         </p:style>
         <p:txBody>
-          <a:bodyPr rtlCol="0" anchor="ctr" wrap="square" lIns="109728" rIns="109728" tIns="54864" bIns="54864"/>
+          <a:bodyPr wrap="square" lIns="109728" tIns="54864" rIns="109728" bIns="54864" rtlCol="0" anchor="ctr"/>
           <a:lstStyle/>
           <a:p>
             <a:pPr algn="ctr">
@@ -5762,7 +5790,7 @@
           <a:noFill/>
         </p:spPr>
         <p:txBody>
-          <a:bodyPr wrap="square" anchor="ctr" lIns="109728" rIns="109728" tIns="54864" bIns="54864">
+          <a:bodyPr wrap="square" lIns="109728" tIns="54864" rIns="109728" bIns="54864" anchor="ctr">
             <a:spAutoFit/>
           </a:bodyPr>
           <a:lstStyle/>
@@ -5849,6 +5877,7 @@
           <a:lstStyle/>
           <a:p>
             <a:pPr algn="ctr"/>
+            <a:endParaRPr/>
           </a:p>
         </p:txBody>
       </p:sp>
@@ -5889,7 +5918,7 @@
           </a:fontRef>
         </p:style>
         <p:txBody>
-          <a:bodyPr rtlCol="0" anchor="ctr" wrap="square" lIns="109728" rIns="109728" tIns="54864" bIns="54864"/>
+          <a:bodyPr wrap="square" lIns="109728" tIns="54864" rIns="109728" bIns="54864" rtlCol="0" anchor="ctr"/>
           <a:lstStyle/>
           <a:p>
             <a:pPr algn="ctr">
@@ -5929,7 +5958,7 @@
           <a:noFill/>
         </p:spPr>
         <p:txBody>
-          <a:bodyPr wrap="square" anchor="ctr" lIns="109728" rIns="109728" tIns="54864" bIns="54864">
+          <a:bodyPr wrap="square" lIns="109728" tIns="54864" rIns="109728" bIns="54864" anchor="ctr">
             <a:spAutoFit/>
           </a:bodyPr>
           <a:lstStyle/>
@@ -6016,6 +6045,7 @@
           <a:lstStyle/>
           <a:p>
             <a:pPr algn="ctr"/>
+            <a:endParaRPr/>
           </a:p>
         </p:txBody>
       </p:sp>
@@ -6056,7 +6086,7 @@
           </a:fontRef>
         </p:style>
         <p:txBody>
-          <a:bodyPr rtlCol="0" anchor="ctr" wrap="square" lIns="109728" rIns="109728" tIns="54864" bIns="54864"/>
+          <a:bodyPr wrap="square" lIns="109728" tIns="54864" rIns="109728" bIns="54864" rtlCol="0" anchor="ctr"/>
           <a:lstStyle/>
           <a:p>
             <a:pPr algn="ctr">
@@ -6096,7 +6126,7 @@
           <a:noFill/>
         </p:spPr>
         <p:txBody>
-          <a:bodyPr wrap="square" anchor="ctr" lIns="109728" rIns="109728" tIns="54864" bIns="54864">
+          <a:bodyPr wrap="square" lIns="109728" tIns="54864" rIns="109728" bIns="54864" anchor="ctr">
             <a:spAutoFit/>
           </a:bodyPr>
           <a:lstStyle/>
@@ -6149,7 +6179,7 @@
 </file>
 
 <file path=ppt/slides/slide13.xml><?xml version="1.0" encoding="utf-8"?>
-<p:sld xmlns:a="http://schemas.openxmlformats.org/drawingml/2006/main" xmlns:p="http://schemas.openxmlformats.org/presentationml/2006/main" xmlns:r="http://schemas.openxmlformats.org/officeDocument/2006/relationships">
+<p:sld xmlns:a="http://schemas.openxmlformats.org/drawingml/2006/main" xmlns:r="http://schemas.openxmlformats.org/officeDocument/2006/relationships" xmlns:p="http://schemas.openxmlformats.org/presentationml/2006/main">
   <p:cSld>
     <p:spTree>
       <p:nvGrpSpPr>
@@ -6157,7 +6187,14 @@
         <p:cNvGrpSpPr/>
         <p:nvPr/>
       </p:nvGrpSpPr>
-      <p:grpSpPr/>
+      <p:grpSpPr>
+        <a:xfrm>
+          <a:off x="0" y="0"/>
+          <a:ext cx="0" cy="0"/>
+          <a:chOff x="0" y="0"/>
+          <a:chExt cx="0" cy="0"/>
+        </a:xfrm>
+      </p:grpSpPr>
       <p:sp>
         <p:nvSpPr>
           <p:cNvPr id="2" name="Rectangle 1"/>
@@ -6199,6 +6236,7 @@
           <a:lstStyle/>
           <a:p>
             <a:pPr algn="ctr"/>
+            <a:endParaRPr/>
           </a:p>
         </p:txBody>
       </p:sp>
@@ -6243,6 +6281,7 @@
           <a:lstStyle/>
           <a:p>
             <a:pPr algn="ctr"/>
+            <a:endParaRPr/>
           </a:p>
         </p:txBody>
       </p:sp>
@@ -6263,7 +6302,7 @@
           <a:noFill/>
         </p:spPr>
         <p:txBody>
-          <a:bodyPr wrap="square" anchor="t" lIns="109728" rIns="109728" tIns="54864" bIns="54864">
+          <a:bodyPr wrap="square" lIns="109728" tIns="54864" rIns="109728" bIns="54864" anchor="t">
             <a:spAutoFit/>
           </a:bodyPr>
           <a:lstStyle/>
@@ -6305,7 +6344,7 @@
           <a:noFill/>
         </p:spPr>
         <p:txBody>
-          <a:bodyPr wrap="square" anchor="ctr" lIns="109728" rIns="109728" tIns="54864" bIns="54864">
+          <a:bodyPr wrap="square" lIns="109728" tIns="54864" rIns="109728" bIns="54864" anchor="ctr">
             <a:spAutoFit/>
           </a:bodyPr>
           <a:lstStyle/>
@@ -6371,6 +6410,7 @@
           <a:lstStyle/>
           <a:p>
             <a:pPr algn="ctr"/>
+            <a:endParaRPr/>
           </a:p>
         </p:txBody>
       </p:sp>
@@ -6391,7 +6431,7 @@
           <a:noFill/>
         </p:spPr>
         <p:txBody>
-          <a:bodyPr wrap="square" anchor="ctr" lIns="109728" rIns="109728" tIns="54864" bIns="54864">
+          <a:bodyPr wrap="square" lIns="109728" tIns="54864" rIns="109728" bIns="54864" anchor="ctr">
             <a:spAutoFit/>
           </a:bodyPr>
           <a:lstStyle/>
@@ -6433,7 +6473,7 @@
           <a:noFill/>
         </p:spPr>
         <p:txBody>
-          <a:bodyPr wrap="square" anchor="ctr" lIns="109728" rIns="109728" tIns="54864" bIns="54864">
+          <a:bodyPr wrap="square" lIns="109728" tIns="54864" rIns="109728" bIns="54864" anchor="ctr">
             <a:spAutoFit/>
           </a:bodyPr>
           <a:lstStyle/>
@@ -6503,6 +6543,7 @@
           <a:lstStyle/>
           <a:p>
             <a:pPr algn="ctr"/>
+            <a:endParaRPr/>
           </a:p>
         </p:txBody>
       </p:sp>
@@ -6543,7 +6584,7 @@
           </a:fontRef>
         </p:style>
         <p:txBody>
-          <a:bodyPr rtlCol="0" anchor="ctr" wrap="square" lIns="109728" rIns="109728" tIns="54864" bIns="54864"/>
+          <a:bodyPr wrap="square" lIns="109728" tIns="54864" rIns="109728" bIns="54864" rtlCol="0" anchor="ctr"/>
           <a:lstStyle/>
           <a:p>
             <a:pPr algn="ctr">
@@ -6583,7 +6624,7 @@
           <a:noFill/>
         </p:spPr>
         <p:txBody>
-          <a:bodyPr wrap="square" anchor="ctr" lIns="109728" rIns="109728" tIns="54864" bIns="54864">
+          <a:bodyPr wrap="square" lIns="109728" tIns="54864" rIns="109728" bIns="54864" anchor="ctr">
             <a:spAutoFit/>
           </a:bodyPr>
           <a:lstStyle/>
@@ -6653,6 +6694,7 @@
           <a:lstStyle/>
           <a:p>
             <a:pPr algn="ctr"/>
+            <a:endParaRPr/>
           </a:p>
         </p:txBody>
       </p:sp>
@@ -6693,7 +6735,7 @@
           </a:fontRef>
         </p:style>
         <p:txBody>
-          <a:bodyPr rtlCol="0" anchor="ctr" wrap="square" lIns="109728" rIns="109728" tIns="54864" bIns="54864"/>
+          <a:bodyPr wrap="square" lIns="109728" tIns="54864" rIns="109728" bIns="54864" rtlCol="0" anchor="ctr"/>
           <a:lstStyle/>
           <a:p>
             <a:pPr algn="ctr">
@@ -6733,7 +6775,7 @@
           <a:noFill/>
         </p:spPr>
         <p:txBody>
-          <a:bodyPr wrap="square" anchor="ctr" lIns="109728" rIns="109728" tIns="54864" bIns="54864">
+          <a:bodyPr wrap="square" lIns="109728" tIns="54864" rIns="109728" bIns="54864" anchor="ctr">
             <a:spAutoFit/>
           </a:bodyPr>
           <a:lstStyle/>
@@ -6803,6 +6845,7 @@
           <a:lstStyle/>
           <a:p>
             <a:pPr algn="ctr"/>
+            <a:endParaRPr/>
           </a:p>
         </p:txBody>
       </p:sp>
@@ -6843,7 +6886,7 @@
           </a:fontRef>
         </p:style>
         <p:txBody>
-          <a:bodyPr rtlCol="0" anchor="ctr" wrap="square" lIns="109728" rIns="109728" tIns="54864" bIns="54864"/>
+          <a:bodyPr wrap="square" lIns="109728" tIns="54864" rIns="109728" bIns="54864" rtlCol="0" anchor="ctr"/>
           <a:lstStyle/>
           <a:p>
             <a:pPr algn="ctr">
@@ -6883,7 +6926,7 @@
           <a:noFill/>
         </p:spPr>
         <p:txBody>
-          <a:bodyPr wrap="square" anchor="ctr" lIns="109728" rIns="109728" tIns="54864" bIns="54864">
+          <a:bodyPr wrap="square" lIns="109728" tIns="54864" rIns="109728" bIns="54864" anchor="ctr">
             <a:spAutoFit/>
           </a:bodyPr>
           <a:lstStyle/>
@@ -6953,6 +6996,7 @@
           <a:lstStyle/>
           <a:p>
             <a:pPr algn="ctr"/>
+            <a:endParaRPr/>
           </a:p>
         </p:txBody>
       </p:sp>
@@ -6993,7 +7037,7 @@
           </a:fontRef>
         </p:style>
         <p:txBody>
-          <a:bodyPr rtlCol="0" anchor="ctr" wrap="square" lIns="109728" rIns="109728" tIns="54864" bIns="54864"/>
+          <a:bodyPr wrap="square" lIns="109728" tIns="54864" rIns="109728" bIns="54864" rtlCol="0" anchor="ctr"/>
           <a:lstStyle/>
           <a:p>
             <a:pPr algn="ctr">
@@ -7033,7 +7077,7 @@
           <a:noFill/>
         </p:spPr>
         <p:txBody>
-          <a:bodyPr wrap="square" anchor="ctr" lIns="109728" rIns="109728" tIns="54864" bIns="54864">
+          <a:bodyPr wrap="square" lIns="109728" tIns="54864" rIns="109728" bIns="54864" anchor="ctr">
             <a:spAutoFit/>
           </a:bodyPr>
           <a:lstStyle/>
@@ -7103,6 +7147,7 @@
           <a:lstStyle/>
           <a:p>
             <a:pPr algn="ctr"/>
+            <a:endParaRPr/>
           </a:p>
         </p:txBody>
       </p:sp>
@@ -7143,7 +7188,7 @@
           </a:fontRef>
         </p:style>
         <p:txBody>
-          <a:bodyPr rtlCol="0" anchor="ctr" wrap="square" lIns="109728" rIns="109728" tIns="54864" bIns="54864"/>
+          <a:bodyPr wrap="square" lIns="109728" tIns="54864" rIns="109728" bIns="54864" rtlCol="0" anchor="ctr"/>
           <a:lstStyle/>
           <a:p>
             <a:pPr algn="ctr">
@@ -7183,7 +7228,7 @@
           <a:noFill/>
         </p:spPr>
         <p:txBody>
-          <a:bodyPr wrap="square" anchor="ctr" lIns="109728" rIns="109728" tIns="54864" bIns="54864">
+          <a:bodyPr wrap="square" lIns="109728" tIns="54864" rIns="109728" bIns="54864" anchor="ctr">
             <a:spAutoFit/>
           </a:bodyPr>
           <a:lstStyle/>
@@ -7217,7 +7262,7 @@
 </file>
 
 <file path=ppt/slides/slide14.xml><?xml version="1.0" encoding="utf-8"?>
-<p:sld xmlns:a="http://schemas.openxmlformats.org/drawingml/2006/main" xmlns:p="http://schemas.openxmlformats.org/presentationml/2006/main" xmlns:r="http://schemas.openxmlformats.org/officeDocument/2006/relationships">
+<p:sld xmlns:a="http://schemas.openxmlformats.org/drawingml/2006/main" xmlns:r="http://schemas.openxmlformats.org/officeDocument/2006/relationships" xmlns:p="http://schemas.openxmlformats.org/presentationml/2006/main">
   <p:cSld>
     <p:spTree>
       <p:nvGrpSpPr>
@@ -7225,7 +7270,14 @@
         <p:cNvGrpSpPr/>
         <p:nvPr/>
       </p:nvGrpSpPr>
-      <p:grpSpPr/>
+      <p:grpSpPr>
+        <a:xfrm>
+          <a:off x="0" y="0"/>
+          <a:ext cx="0" cy="0"/>
+          <a:chOff x="0" y="0"/>
+          <a:chExt cx="0" cy="0"/>
+        </a:xfrm>
+      </p:grpSpPr>
       <p:sp>
         <p:nvSpPr>
           <p:cNvPr id="2" name="Rectangle 1"/>
@@ -7267,6 +7319,7 @@
           <a:lstStyle/>
           <a:p>
             <a:pPr algn="ctr"/>
+            <a:endParaRPr/>
           </a:p>
         </p:txBody>
       </p:sp>
@@ -7311,6 +7364,7 @@
           <a:lstStyle/>
           <a:p>
             <a:pPr algn="ctr"/>
+            <a:endParaRPr/>
           </a:p>
         </p:txBody>
       </p:sp>
@@ -7355,6 +7409,7 @@
           <a:lstStyle/>
           <a:p>
             <a:pPr algn="ctr"/>
+            <a:endParaRPr/>
           </a:p>
         </p:txBody>
       </p:sp>
@@ -7375,7 +7430,7 @@
           <a:noFill/>
         </p:spPr>
         <p:txBody>
-          <a:bodyPr wrap="square" anchor="t" lIns="109728" rIns="109728" tIns="54864" bIns="54864">
+          <a:bodyPr wrap="square" lIns="109728" tIns="54864" rIns="109728" bIns="54864" anchor="t">
             <a:spAutoFit/>
           </a:bodyPr>
           <a:lstStyle/>
@@ -7417,7 +7472,7 @@
           <a:noFill/>
         </p:spPr>
         <p:txBody>
-          <a:bodyPr wrap="square" anchor="t" lIns="109728" rIns="109728" tIns="54864" bIns="54864">
+          <a:bodyPr wrap="square" lIns="109728" tIns="54864" rIns="109728" bIns="54864" anchor="t">
             <a:spAutoFit/>
           </a:bodyPr>
           <a:lstStyle/>
@@ -7481,7 +7536,7 @@
           </a:fontRef>
         </p:style>
         <p:txBody>
-          <a:bodyPr rtlCol="0" anchor="ctr" wrap="square" lIns="109728" rIns="109728" tIns="54864" bIns="54864"/>
+          <a:bodyPr wrap="square" lIns="109728" tIns="54864" rIns="109728" bIns="54864" rtlCol="0" anchor="ctr"/>
           <a:lstStyle/>
           <a:p>
             <a:pPr algn="ctr">
@@ -7513,7 +7568,7 @@
 </file>
 
 <file path=ppt/slides/slide2.xml><?xml version="1.0" encoding="utf-8"?>
-<p:sld xmlns:a="http://schemas.openxmlformats.org/drawingml/2006/main" xmlns:p="http://schemas.openxmlformats.org/presentationml/2006/main" xmlns:r="http://schemas.openxmlformats.org/officeDocument/2006/relationships">
+<p:sld xmlns:a="http://schemas.openxmlformats.org/drawingml/2006/main" xmlns:r="http://schemas.openxmlformats.org/officeDocument/2006/relationships" xmlns:p="http://schemas.openxmlformats.org/presentationml/2006/main">
   <p:cSld>
     <p:spTree>
       <p:nvGrpSpPr>
@@ -7521,7 +7576,14 @@
         <p:cNvGrpSpPr/>
         <p:nvPr/>
       </p:nvGrpSpPr>
-      <p:grpSpPr/>
+      <p:grpSpPr>
+        <a:xfrm>
+          <a:off x="0" y="0"/>
+          <a:ext cx="0" cy="0"/>
+          <a:chOff x="0" y="0"/>
+          <a:chExt cx="0" cy="0"/>
+        </a:xfrm>
+      </p:grpSpPr>
       <p:sp>
         <p:nvSpPr>
           <p:cNvPr id="2" name="Rectangle 1"/>
@@ -7563,6 +7625,7 @@
           <a:lstStyle/>
           <a:p>
             <a:pPr algn="ctr"/>
+            <a:endParaRPr/>
           </a:p>
         </p:txBody>
       </p:sp>
@@ -7607,6 +7670,7 @@
           <a:lstStyle/>
           <a:p>
             <a:pPr algn="ctr"/>
+            <a:endParaRPr/>
           </a:p>
         </p:txBody>
       </p:sp>
@@ -7627,7 +7691,7 @@
           <a:noFill/>
         </p:spPr>
         <p:txBody>
-          <a:bodyPr wrap="square" anchor="t" lIns="109728" rIns="109728" tIns="54864" bIns="54864">
+          <a:bodyPr wrap="square" lIns="109728" tIns="54864" rIns="109728" bIns="54864" anchor="t">
             <a:spAutoFit/>
           </a:bodyPr>
           <a:lstStyle/>
@@ -7669,7 +7733,7 @@
           <a:noFill/>
         </p:spPr>
         <p:txBody>
-          <a:bodyPr wrap="square" anchor="ctr" lIns="109728" rIns="109728" tIns="54864" bIns="54864">
+          <a:bodyPr wrap="square" lIns="109728" tIns="54864" rIns="109728" bIns="54864" anchor="ctr">
             <a:spAutoFit/>
           </a:bodyPr>
           <a:lstStyle/>
@@ -7735,6 +7799,7 @@
           <a:lstStyle/>
           <a:p>
             <a:pPr algn="ctr"/>
+            <a:endParaRPr/>
           </a:p>
         </p:txBody>
       </p:sp>
@@ -7755,7 +7820,7 @@
           <a:noFill/>
         </p:spPr>
         <p:txBody>
-          <a:bodyPr wrap="square" anchor="ctr" lIns="109728" rIns="109728" tIns="54864" bIns="54864">
+          <a:bodyPr wrap="square" lIns="109728" tIns="54864" rIns="109728" bIns="54864" anchor="ctr">
             <a:spAutoFit/>
           </a:bodyPr>
           <a:lstStyle/>
@@ -7797,7 +7862,7 @@
           <a:noFill/>
         </p:spPr>
         <p:txBody>
-          <a:bodyPr wrap="square" anchor="ctr" lIns="109728" rIns="109728" tIns="54864" bIns="54864">
+          <a:bodyPr wrap="square" lIns="109728" tIns="54864" rIns="109728" bIns="54864" anchor="ctr">
             <a:spAutoFit/>
           </a:bodyPr>
           <a:lstStyle/>
@@ -7845,13 +7910,6 @@
             <a:noFill/>
           </a:ln>
           <a:effectLst/>
-          <a:effectLst>
-            <a:outerShdw blurRad="60000" dist="25000" dir="5400000" rotWithShape="0">
-              <a:srgbClr val="1A1A2E">
-                <a:alpha val="22000"/>
-              </a:srgbClr>
-            </a:outerShdw>
-          </a:effectLst>
         </p:spPr>
         <p:style>
           <a:lnRef idx="1">
@@ -7872,6 +7930,7 @@
           <a:lstStyle/>
           <a:p>
             <a:pPr algn="ctr"/>
+            <a:endParaRPr/>
           </a:p>
         </p:txBody>
       </p:sp>
@@ -7892,7 +7951,7 @@
           <a:noFill/>
         </p:spPr>
         <p:txBody>
-          <a:bodyPr wrap="square" anchor="ctr" lIns="109728" rIns="109728" tIns="54864" bIns="54864">
+          <a:bodyPr wrap="square" lIns="109728" tIns="54864" rIns="109728" bIns="54864" anchor="ctr">
             <a:spAutoFit/>
           </a:bodyPr>
           <a:lstStyle/>
@@ -7934,7 +7993,7 @@
           <a:noFill/>
         </p:spPr>
         <p:txBody>
-          <a:bodyPr wrap="square" anchor="ctr" lIns="109728" rIns="109728" tIns="54864" bIns="54864">
+          <a:bodyPr wrap="square" lIns="109728" tIns="54864" rIns="109728" bIns="54864" anchor="ctr">
             <a:spAutoFit/>
           </a:bodyPr>
           <a:lstStyle/>
@@ -7982,13 +8041,6 @@
             <a:noFill/>
           </a:ln>
           <a:effectLst/>
-          <a:effectLst>
-            <a:outerShdw blurRad="60000" dist="25000" dir="5400000" rotWithShape="0">
-              <a:srgbClr val="1A1A2E">
-                <a:alpha val="22000"/>
-              </a:srgbClr>
-            </a:outerShdw>
-          </a:effectLst>
         </p:spPr>
         <p:style>
           <a:lnRef idx="1">
@@ -8009,6 +8061,7 @@
           <a:lstStyle/>
           <a:p>
             <a:pPr algn="ctr"/>
+            <a:endParaRPr/>
           </a:p>
         </p:txBody>
       </p:sp>
@@ -8029,7 +8082,7 @@
           <a:noFill/>
         </p:spPr>
         <p:txBody>
-          <a:bodyPr wrap="square" anchor="ctr" lIns="109728" rIns="109728" tIns="54864" bIns="54864">
+          <a:bodyPr wrap="square" lIns="109728" tIns="54864" rIns="109728" bIns="54864" anchor="ctr">
             <a:spAutoFit/>
           </a:bodyPr>
           <a:lstStyle/>
@@ -8071,7 +8124,7 @@
           <a:noFill/>
         </p:spPr>
         <p:txBody>
-          <a:bodyPr wrap="square" anchor="ctr" lIns="109728" rIns="109728" tIns="54864" bIns="54864">
+          <a:bodyPr wrap="square" lIns="109728" tIns="54864" rIns="109728" bIns="54864" anchor="ctr">
             <a:spAutoFit/>
           </a:bodyPr>
           <a:lstStyle/>
@@ -8119,13 +8172,6 @@
             <a:noFill/>
           </a:ln>
           <a:effectLst/>
-          <a:effectLst>
-            <a:outerShdw blurRad="60000" dist="25000" dir="5400000" rotWithShape="0">
-              <a:srgbClr val="1A1A2E">
-                <a:alpha val="22000"/>
-              </a:srgbClr>
-            </a:outerShdw>
-          </a:effectLst>
         </p:spPr>
         <p:style>
           <a:lnRef idx="1">
@@ -8146,6 +8192,7 @@
           <a:lstStyle/>
           <a:p>
             <a:pPr algn="ctr"/>
+            <a:endParaRPr/>
           </a:p>
         </p:txBody>
       </p:sp>
@@ -8166,7 +8213,7 @@
           <a:noFill/>
         </p:spPr>
         <p:txBody>
-          <a:bodyPr wrap="square" anchor="ctr" lIns="109728" rIns="109728" tIns="54864" bIns="54864">
+          <a:bodyPr wrap="square" lIns="109728" tIns="54864" rIns="109728" bIns="54864" anchor="ctr">
             <a:spAutoFit/>
           </a:bodyPr>
           <a:lstStyle/>
@@ -8208,7 +8255,7 @@
           <a:noFill/>
         </p:spPr>
         <p:txBody>
-          <a:bodyPr wrap="square" anchor="ctr" lIns="109728" rIns="109728" tIns="54864" bIns="54864">
+          <a:bodyPr wrap="square" lIns="109728" tIns="54864" rIns="109728" bIns="54864" anchor="ctr">
             <a:spAutoFit/>
           </a:bodyPr>
           <a:lstStyle/>
@@ -8250,7 +8297,7 @@
           <a:noFill/>
         </p:spPr>
         <p:txBody>
-          <a:bodyPr wrap="square" anchor="t" lIns="109728" rIns="109728" tIns="54864" bIns="54864">
+          <a:bodyPr wrap="square" lIns="109728" tIns="54864" rIns="109728" bIns="54864" anchor="t">
             <a:spAutoFit/>
           </a:bodyPr>
           <a:lstStyle/>
@@ -8318,6 +8365,7 @@
           <a:lstStyle/>
           <a:p>
             <a:pPr algn="ctr"/>
+            <a:endParaRPr/>
           </a:p>
         </p:txBody>
       </p:sp>
@@ -8360,7 +8408,7 @@
           </a:fontRef>
         </p:style>
         <p:txBody>
-          <a:bodyPr rtlCol="0" anchor="ctr" wrap="square" lIns="109728" rIns="109728" tIns="54864" bIns="54864"/>
+          <a:bodyPr wrap="square" lIns="109728" tIns="54864" rIns="109728" bIns="54864" rtlCol="0" anchor="ctr"/>
           <a:lstStyle/>
           <a:p>
             <a:pPr algn="ctr">
@@ -8400,7 +8448,7 @@
           <a:noFill/>
         </p:spPr>
         <p:txBody>
-          <a:bodyPr wrap="square" anchor="ctr" lIns="109728" rIns="109728" tIns="54864" bIns="54864">
+          <a:bodyPr wrap="square" lIns="109728" tIns="54864" rIns="109728" bIns="54864" anchor="ctr">
             <a:spAutoFit/>
           </a:bodyPr>
           <a:lstStyle/>
@@ -8468,6 +8516,7 @@
           <a:lstStyle/>
           <a:p>
             <a:pPr algn="ctr"/>
+            <a:endParaRPr/>
           </a:p>
         </p:txBody>
       </p:sp>
@@ -8510,7 +8559,7 @@
           </a:fontRef>
         </p:style>
         <p:txBody>
-          <a:bodyPr rtlCol="0" anchor="ctr" wrap="square" lIns="109728" rIns="109728" tIns="54864" bIns="54864"/>
+          <a:bodyPr wrap="square" lIns="109728" tIns="54864" rIns="109728" bIns="54864" rtlCol="0" anchor="ctr"/>
           <a:lstStyle/>
           <a:p>
             <a:pPr algn="ctr">
@@ -8550,7 +8599,7 @@
           <a:noFill/>
         </p:spPr>
         <p:txBody>
-          <a:bodyPr wrap="square" anchor="ctr" lIns="109728" rIns="109728" tIns="54864" bIns="54864">
+          <a:bodyPr wrap="square" lIns="109728" tIns="54864" rIns="109728" bIns="54864" anchor="ctr">
             <a:spAutoFit/>
           </a:bodyPr>
           <a:lstStyle/>
@@ -8618,6 +8667,7 @@
           <a:lstStyle/>
           <a:p>
             <a:pPr algn="ctr"/>
+            <a:endParaRPr/>
           </a:p>
         </p:txBody>
       </p:sp>
@@ -8660,7 +8710,7 @@
           </a:fontRef>
         </p:style>
         <p:txBody>
-          <a:bodyPr rtlCol="0" anchor="ctr" wrap="square" lIns="109728" rIns="109728" tIns="54864" bIns="54864"/>
+          <a:bodyPr wrap="square" lIns="109728" tIns="54864" rIns="109728" bIns="54864" rtlCol="0" anchor="ctr"/>
           <a:lstStyle/>
           <a:p>
             <a:pPr algn="ctr">
@@ -8700,7 +8750,7 @@
           <a:noFill/>
         </p:spPr>
         <p:txBody>
-          <a:bodyPr wrap="square" anchor="ctr" lIns="109728" rIns="109728" tIns="54864" bIns="54864">
+          <a:bodyPr wrap="square" lIns="109728" tIns="54864" rIns="109728" bIns="54864" anchor="ctr">
             <a:spAutoFit/>
           </a:bodyPr>
           <a:lstStyle/>
@@ -8768,6 +8818,7 @@
           <a:lstStyle/>
           <a:p>
             <a:pPr algn="ctr"/>
+            <a:endParaRPr/>
           </a:p>
         </p:txBody>
       </p:sp>
@@ -8810,7 +8861,7 @@
           </a:fontRef>
         </p:style>
         <p:txBody>
-          <a:bodyPr rtlCol="0" anchor="ctr" wrap="square" lIns="109728" rIns="109728" tIns="54864" bIns="54864"/>
+          <a:bodyPr wrap="square" lIns="109728" tIns="54864" rIns="109728" bIns="54864" rtlCol="0" anchor="ctr"/>
           <a:lstStyle/>
           <a:p>
             <a:pPr algn="ctr">
@@ -8850,7 +8901,7 @@
           <a:noFill/>
         </p:spPr>
         <p:txBody>
-          <a:bodyPr wrap="square" anchor="ctr" lIns="109728" rIns="109728" tIns="54864" bIns="54864">
+          <a:bodyPr wrap="square" lIns="109728" tIns="54864" rIns="109728" bIns="54864" anchor="ctr">
             <a:spAutoFit/>
           </a:bodyPr>
           <a:lstStyle/>
@@ -8918,6 +8969,7 @@
           <a:lstStyle/>
           <a:p>
             <a:pPr algn="ctr"/>
+            <a:endParaRPr/>
           </a:p>
         </p:txBody>
       </p:sp>
@@ -8960,7 +9012,7 @@
           </a:fontRef>
         </p:style>
         <p:txBody>
-          <a:bodyPr rtlCol="0" anchor="ctr" wrap="square" lIns="109728" rIns="109728" tIns="54864" bIns="54864"/>
+          <a:bodyPr wrap="square" lIns="109728" tIns="54864" rIns="109728" bIns="54864" rtlCol="0" anchor="ctr"/>
           <a:lstStyle/>
           <a:p>
             <a:pPr algn="ctr">
@@ -9000,7 +9052,7 @@
           <a:noFill/>
         </p:spPr>
         <p:txBody>
-          <a:bodyPr wrap="square" anchor="ctr" lIns="109728" rIns="109728" tIns="54864" bIns="54864">
+          <a:bodyPr wrap="square" lIns="109728" tIns="54864" rIns="109728" bIns="54864" anchor="ctr">
             <a:spAutoFit/>
           </a:bodyPr>
           <a:lstStyle/>
@@ -9034,7 +9086,7 @@
 </file>
 
 <file path=ppt/slides/slide3.xml><?xml version="1.0" encoding="utf-8"?>
-<p:sld xmlns:a="http://schemas.openxmlformats.org/drawingml/2006/main" xmlns:p="http://schemas.openxmlformats.org/presentationml/2006/main" xmlns:r="http://schemas.openxmlformats.org/officeDocument/2006/relationships">
+<p:sld xmlns:a="http://schemas.openxmlformats.org/drawingml/2006/main" xmlns:r="http://schemas.openxmlformats.org/officeDocument/2006/relationships" xmlns:p="http://schemas.openxmlformats.org/presentationml/2006/main">
   <p:cSld>
     <p:spTree>
       <p:nvGrpSpPr>
@@ -9042,7 +9094,14 @@
         <p:cNvGrpSpPr/>
         <p:nvPr/>
       </p:nvGrpSpPr>
-      <p:grpSpPr/>
+      <p:grpSpPr>
+        <a:xfrm>
+          <a:off x="0" y="0"/>
+          <a:ext cx="0" cy="0"/>
+          <a:chOff x="0" y="0"/>
+          <a:chExt cx="0" cy="0"/>
+        </a:xfrm>
+      </p:grpSpPr>
       <p:sp>
         <p:nvSpPr>
           <p:cNvPr id="2" name="Rectangle 1"/>
@@ -9084,6 +9143,7 @@
           <a:lstStyle/>
           <a:p>
             <a:pPr algn="ctr"/>
+            <a:endParaRPr/>
           </a:p>
         </p:txBody>
       </p:sp>
@@ -9128,6 +9188,7 @@
           <a:lstStyle/>
           <a:p>
             <a:pPr algn="ctr"/>
+            <a:endParaRPr/>
           </a:p>
         </p:txBody>
       </p:sp>
@@ -9148,7 +9209,7 @@
           <a:noFill/>
         </p:spPr>
         <p:txBody>
-          <a:bodyPr wrap="square" anchor="t" lIns="109728" rIns="109728" tIns="54864" bIns="54864">
+          <a:bodyPr wrap="square" lIns="109728" tIns="54864" rIns="109728" bIns="54864" anchor="t">
             <a:spAutoFit/>
           </a:bodyPr>
           <a:lstStyle/>
@@ -9190,7 +9251,7 @@
           <a:noFill/>
         </p:spPr>
         <p:txBody>
-          <a:bodyPr wrap="square" anchor="ctr" lIns="109728" rIns="109728" tIns="54864" bIns="54864">
+          <a:bodyPr wrap="square" lIns="109728" tIns="54864" rIns="109728" bIns="54864" anchor="ctr">
             <a:spAutoFit/>
           </a:bodyPr>
           <a:lstStyle/>
@@ -9256,6 +9317,7 @@
           <a:lstStyle/>
           <a:p>
             <a:pPr algn="ctr"/>
+            <a:endParaRPr/>
           </a:p>
         </p:txBody>
       </p:sp>
@@ -9276,7 +9338,7 @@
           <a:noFill/>
         </p:spPr>
         <p:txBody>
-          <a:bodyPr wrap="square" anchor="ctr" lIns="109728" rIns="109728" tIns="54864" bIns="54864">
+          <a:bodyPr wrap="square" lIns="109728" tIns="54864" rIns="109728" bIns="54864" anchor="ctr">
             <a:spAutoFit/>
           </a:bodyPr>
           <a:lstStyle/>
@@ -9318,7 +9380,7 @@
           <a:noFill/>
         </p:spPr>
         <p:txBody>
-          <a:bodyPr wrap="square" anchor="ctr" lIns="109728" rIns="109728" tIns="54864" bIns="54864">
+          <a:bodyPr wrap="square" lIns="109728" tIns="54864" rIns="109728" bIns="54864" anchor="ctr">
             <a:spAutoFit/>
           </a:bodyPr>
           <a:lstStyle/>
@@ -9388,6 +9450,7 @@
           <a:lstStyle/>
           <a:p>
             <a:pPr algn="ctr"/>
+            <a:endParaRPr/>
           </a:p>
         </p:txBody>
       </p:sp>
@@ -9408,7 +9471,7 @@
           <a:noFill/>
         </p:spPr>
         <p:txBody>
-          <a:bodyPr wrap="square" anchor="ctr" lIns="109728" rIns="109728" tIns="54864" bIns="54864">
+          <a:bodyPr wrap="square" lIns="109728" tIns="54864" rIns="109728" bIns="54864" anchor="ctr">
             <a:spAutoFit/>
           </a:bodyPr>
           <a:lstStyle/>
@@ -9450,7 +9513,7 @@
           <a:noFill/>
         </p:spPr>
         <p:txBody>
-          <a:bodyPr wrap="square" anchor="ctr" lIns="109728" rIns="109728" tIns="54864" bIns="54864">
+          <a:bodyPr wrap="square" lIns="109728" tIns="54864" rIns="109728" bIns="54864" anchor="ctr">
             <a:spAutoFit/>
           </a:bodyPr>
           <a:lstStyle/>
@@ -9520,6 +9583,7 @@
           <a:lstStyle/>
           <a:p>
             <a:pPr algn="ctr"/>
+            <a:endParaRPr/>
           </a:p>
         </p:txBody>
       </p:sp>
@@ -9540,7 +9604,7 @@
           <a:noFill/>
         </p:spPr>
         <p:txBody>
-          <a:bodyPr wrap="square" anchor="ctr" lIns="109728" rIns="109728" tIns="54864" bIns="54864">
+          <a:bodyPr wrap="square" lIns="109728" tIns="54864" rIns="109728" bIns="54864" anchor="ctr">
             <a:spAutoFit/>
           </a:bodyPr>
           <a:lstStyle/>
@@ -9582,7 +9646,7 @@
           <a:noFill/>
         </p:spPr>
         <p:txBody>
-          <a:bodyPr wrap="square" anchor="ctr" lIns="109728" rIns="109728" tIns="54864" bIns="54864">
+          <a:bodyPr wrap="square" lIns="109728" tIns="54864" rIns="109728" bIns="54864" anchor="ctr">
             <a:spAutoFit/>
           </a:bodyPr>
           <a:lstStyle/>
@@ -9652,6 +9716,7 @@
           <a:lstStyle/>
           <a:p>
             <a:pPr algn="ctr"/>
+            <a:endParaRPr/>
           </a:p>
         </p:txBody>
       </p:sp>
@@ -9672,7 +9737,7 @@
           <a:noFill/>
         </p:spPr>
         <p:txBody>
-          <a:bodyPr wrap="square" anchor="ctr" lIns="109728" rIns="109728" tIns="54864" bIns="54864">
+          <a:bodyPr wrap="square" lIns="109728" tIns="54864" rIns="109728" bIns="54864" anchor="ctr">
             <a:spAutoFit/>
           </a:bodyPr>
           <a:lstStyle/>
@@ -9714,7 +9779,7 @@
           <a:noFill/>
         </p:spPr>
         <p:txBody>
-          <a:bodyPr wrap="square" anchor="ctr" lIns="109728" rIns="109728" tIns="54864" bIns="54864">
+          <a:bodyPr wrap="square" lIns="109728" tIns="54864" rIns="109728" bIns="54864" anchor="ctr">
             <a:spAutoFit/>
           </a:bodyPr>
           <a:lstStyle/>
@@ -9764,13 +9829,6 @@
             </a:solidFill>
           </a:ln>
           <a:effectLst/>
-          <a:effectLst>
-            <a:outerShdw blurRad="60000" dist="25000" dir="5400000" rotWithShape="0">
-              <a:srgbClr val="1A1A2E">
-                <a:alpha val="22000"/>
-              </a:srgbClr>
-            </a:outerShdw>
-          </a:effectLst>
         </p:spPr>
         <p:style>
           <a:lnRef idx="1">
@@ -9791,6 +9849,7 @@
           <a:lstStyle/>
           <a:p>
             <a:pPr algn="ctr"/>
+            <a:endParaRPr/>
           </a:p>
         </p:txBody>
       </p:sp>
@@ -9811,7 +9870,7 @@
           <a:noFill/>
         </p:spPr>
         <p:txBody>
-          <a:bodyPr wrap="square" anchor="ctr" lIns="109728" rIns="109728" tIns="54864" bIns="54864">
+          <a:bodyPr wrap="square" lIns="109728" tIns="54864" rIns="109728" bIns="54864" anchor="ctr">
             <a:spAutoFit/>
           </a:bodyPr>
           <a:lstStyle/>
@@ -9853,7 +9912,7 @@
           <a:noFill/>
         </p:spPr>
         <p:txBody>
-          <a:bodyPr wrap="square" anchor="ctr" lIns="109728" rIns="109728" tIns="54864" bIns="54864">
+          <a:bodyPr wrap="square" lIns="109728" tIns="54864" rIns="109728" bIns="54864" anchor="ctr">
             <a:spAutoFit/>
           </a:bodyPr>
           <a:lstStyle/>
@@ -9923,6 +9982,7 @@
           <a:lstStyle/>
           <a:p>
             <a:pPr algn="ctr"/>
+            <a:endParaRPr/>
           </a:p>
         </p:txBody>
       </p:sp>
@@ -9943,7 +10003,7 @@
           <a:noFill/>
         </p:spPr>
         <p:txBody>
-          <a:bodyPr wrap="square" anchor="ctr" lIns="109728" rIns="109728" tIns="54864" bIns="54864">
+          <a:bodyPr wrap="square" lIns="109728" tIns="54864" rIns="109728" bIns="54864" anchor="ctr">
             <a:spAutoFit/>
           </a:bodyPr>
           <a:lstStyle/>
@@ -9985,7 +10045,7 @@
           <a:noFill/>
         </p:spPr>
         <p:txBody>
-          <a:bodyPr wrap="square" anchor="ctr" lIns="109728" rIns="109728" tIns="54864" bIns="54864">
+          <a:bodyPr wrap="square" lIns="109728" tIns="54864" rIns="109728" bIns="54864" anchor="ctr">
             <a:spAutoFit/>
           </a:bodyPr>
           <a:lstStyle/>
@@ -10027,7 +10087,7 @@
           <a:noFill/>
         </p:spPr>
         <p:txBody>
-          <a:bodyPr wrap="square" anchor="t" lIns="109728" rIns="109728" tIns="54864" bIns="54864">
+          <a:bodyPr wrap="square" lIns="109728" tIns="54864" rIns="109728" bIns="54864" anchor="t">
             <a:spAutoFit/>
           </a:bodyPr>
           <a:lstStyle/>
@@ -10061,7 +10121,7 @@
 </file>
 
 <file path=ppt/slides/slide4.xml><?xml version="1.0" encoding="utf-8"?>
-<p:sld xmlns:a="http://schemas.openxmlformats.org/drawingml/2006/main" xmlns:p="http://schemas.openxmlformats.org/presentationml/2006/main" xmlns:r="http://schemas.openxmlformats.org/officeDocument/2006/relationships">
+<p:sld xmlns:a="http://schemas.openxmlformats.org/drawingml/2006/main" xmlns:r="http://schemas.openxmlformats.org/officeDocument/2006/relationships" xmlns:p="http://schemas.openxmlformats.org/presentationml/2006/main">
   <p:cSld>
     <p:spTree>
       <p:nvGrpSpPr>
@@ -10069,7 +10129,14 @@
         <p:cNvGrpSpPr/>
         <p:nvPr/>
       </p:nvGrpSpPr>
-      <p:grpSpPr/>
+      <p:grpSpPr>
+        <a:xfrm>
+          <a:off x="0" y="0"/>
+          <a:ext cx="0" cy="0"/>
+          <a:chOff x="0" y="0"/>
+          <a:chExt cx="0" cy="0"/>
+        </a:xfrm>
+      </p:grpSpPr>
       <p:sp>
         <p:nvSpPr>
           <p:cNvPr id="2" name="Rectangle 1"/>
@@ -10111,6 +10178,7 @@
           <a:lstStyle/>
           <a:p>
             <a:pPr algn="ctr"/>
+            <a:endParaRPr/>
           </a:p>
         </p:txBody>
       </p:sp>
@@ -10155,6 +10223,7 @@
           <a:lstStyle/>
           <a:p>
             <a:pPr algn="ctr"/>
+            <a:endParaRPr/>
           </a:p>
         </p:txBody>
       </p:sp>
@@ -10175,7 +10244,7 @@
           <a:noFill/>
         </p:spPr>
         <p:txBody>
-          <a:bodyPr wrap="square" anchor="t" lIns="109728" rIns="109728" tIns="54864" bIns="54864">
+          <a:bodyPr wrap="square" lIns="109728" tIns="54864" rIns="109728" bIns="54864" anchor="t">
             <a:spAutoFit/>
           </a:bodyPr>
           <a:lstStyle/>
@@ -10217,7 +10286,7 @@
           <a:noFill/>
         </p:spPr>
         <p:txBody>
-          <a:bodyPr wrap="square" anchor="ctr" lIns="109728" rIns="109728" tIns="54864" bIns="54864">
+          <a:bodyPr wrap="square" lIns="109728" tIns="54864" rIns="109728" bIns="54864" anchor="ctr">
             <a:spAutoFit/>
           </a:bodyPr>
           <a:lstStyle/>
@@ -10283,6 +10352,7 @@
           <a:lstStyle/>
           <a:p>
             <a:pPr algn="ctr"/>
+            <a:endParaRPr/>
           </a:p>
         </p:txBody>
       </p:sp>
@@ -10303,7 +10373,7 @@
           <a:noFill/>
         </p:spPr>
         <p:txBody>
-          <a:bodyPr wrap="square" anchor="ctr" lIns="109728" rIns="109728" tIns="54864" bIns="54864">
+          <a:bodyPr wrap="square" lIns="109728" tIns="54864" rIns="109728" bIns="54864" anchor="ctr">
             <a:spAutoFit/>
           </a:bodyPr>
           <a:lstStyle/>
@@ -10345,7 +10415,7 @@
           <a:noFill/>
         </p:spPr>
         <p:txBody>
-          <a:bodyPr wrap="square" anchor="ctr" lIns="109728" rIns="109728" tIns="54864" bIns="54864">
+          <a:bodyPr wrap="square" lIns="109728" tIns="54864" rIns="109728" bIns="54864" anchor="ctr">
             <a:spAutoFit/>
           </a:bodyPr>
           <a:lstStyle/>
@@ -10395,13 +10465,6 @@
             </a:solidFill>
           </a:ln>
           <a:effectLst/>
-          <a:effectLst>
-            <a:outerShdw blurRad="60000" dist="25000" dir="5400000" rotWithShape="0">
-              <a:srgbClr val="1A1A2E">
-                <a:alpha val="22000"/>
-              </a:srgbClr>
-            </a:outerShdw>
-          </a:effectLst>
         </p:spPr>
         <p:style>
           <a:lnRef idx="1">
@@ -10422,6 +10485,7 @@
           <a:lstStyle/>
           <a:p>
             <a:pPr algn="ctr"/>
+            <a:endParaRPr/>
           </a:p>
         </p:txBody>
       </p:sp>
@@ -10466,6 +10530,7 @@
           <a:lstStyle/>
           <a:p>
             <a:pPr algn="ctr"/>
+            <a:endParaRPr/>
           </a:p>
         </p:txBody>
       </p:sp>
@@ -10486,7 +10551,7 @@
           <a:noFill/>
         </p:spPr>
         <p:txBody>
-          <a:bodyPr wrap="square" anchor="t" lIns="109728" rIns="109728" tIns="54864" bIns="54864">
+          <a:bodyPr wrap="square" lIns="109728" tIns="54864" rIns="109728" bIns="54864" anchor="t">
             <a:spAutoFit/>
           </a:bodyPr>
           <a:lstStyle/>
@@ -10555,13 +10620,6 @@
             </a:solidFill>
           </a:ln>
           <a:effectLst/>
-          <a:effectLst>
-            <a:outerShdw blurRad="60000" dist="25000" dir="5400000" rotWithShape="0">
-              <a:srgbClr val="1A1A2E">
-                <a:alpha val="22000"/>
-              </a:srgbClr>
-            </a:outerShdw>
-          </a:effectLst>
         </p:spPr>
         <p:style>
           <a:lnRef idx="1">
@@ -10582,6 +10640,7 @@
           <a:lstStyle/>
           <a:p>
             <a:pPr algn="ctr"/>
+            <a:endParaRPr/>
           </a:p>
         </p:txBody>
       </p:sp>
@@ -10626,6 +10685,7 @@
           <a:lstStyle/>
           <a:p>
             <a:pPr algn="ctr"/>
+            <a:endParaRPr/>
           </a:p>
         </p:txBody>
       </p:sp>
@@ -10646,7 +10706,7 @@
           <a:noFill/>
         </p:spPr>
         <p:txBody>
-          <a:bodyPr wrap="square" anchor="t" lIns="109728" rIns="109728" tIns="54864" bIns="54864">
+          <a:bodyPr wrap="square" lIns="109728" tIns="54864" rIns="109728" bIns="54864" anchor="t">
             <a:spAutoFit/>
           </a:bodyPr>
           <a:lstStyle/>
@@ -10715,13 +10775,6 @@
             </a:solidFill>
           </a:ln>
           <a:effectLst/>
-          <a:effectLst>
-            <a:outerShdw blurRad="60000" dist="25000" dir="5400000" rotWithShape="0">
-              <a:srgbClr val="1A1A2E">
-                <a:alpha val="22000"/>
-              </a:srgbClr>
-            </a:outerShdw>
-          </a:effectLst>
         </p:spPr>
         <p:style>
           <a:lnRef idx="1">
@@ -10742,6 +10795,7 @@
           <a:lstStyle/>
           <a:p>
             <a:pPr algn="ctr"/>
+            <a:endParaRPr/>
           </a:p>
         </p:txBody>
       </p:sp>
@@ -10786,6 +10840,7 @@
           <a:lstStyle/>
           <a:p>
             <a:pPr algn="ctr"/>
+            <a:endParaRPr/>
           </a:p>
         </p:txBody>
       </p:sp>
@@ -10806,7 +10861,7 @@
           <a:noFill/>
         </p:spPr>
         <p:txBody>
-          <a:bodyPr wrap="square" anchor="t" lIns="109728" rIns="109728" tIns="54864" bIns="54864">
+          <a:bodyPr wrap="square" lIns="109728" tIns="54864" rIns="109728" bIns="54864" anchor="t">
             <a:spAutoFit/>
           </a:bodyPr>
           <a:lstStyle/>
@@ -10859,7 +10914,7 @@
 </file>
 
 <file path=ppt/slides/slide5.xml><?xml version="1.0" encoding="utf-8"?>
-<p:sld xmlns:a="http://schemas.openxmlformats.org/drawingml/2006/main" xmlns:p="http://schemas.openxmlformats.org/presentationml/2006/main" xmlns:r="http://schemas.openxmlformats.org/officeDocument/2006/relationships">
+<p:sld xmlns:a="http://schemas.openxmlformats.org/drawingml/2006/main" xmlns:r="http://schemas.openxmlformats.org/officeDocument/2006/relationships" xmlns:p="http://schemas.openxmlformats.org/presentationml/2006/main">
   <p:cSld>
     <p:spTree>
       <p:nvGrpSpPr>
@@ -10867,7 +10922,14 @@
         <p:cNvGrpSpPr/>
         <p:nvPr/>
       </p:nvGrpSpPr>
-      <p:grpSpPr/>
+      <p:grpSpPr>
+        <a:xfrm>
+          <a:off x="0" y="0"/>
+          <a:ext cx="0" cy="0"/>
+          <a:chOff x="0" y="0"/>
+          <a:chExt cx="0" cy="0"/>
+        </a:xfrm>
+      </p:grpSpPr>
       <p:sp>
         <p:nvSpPr>
           <p:cNvPr id="2" name="Rectangle 1"/>
@@ -10909,6 +10971,7 @@
           <a:lstStyle/>
           <a:p>
             <a:pPr algn="ctr"/>
+            <a:endParaRPr/>
           </a:p>
         </p:txBody>
       </p:sp>
@@ -10953,6 +11016,7 @@
           <a:lstStyle/>
           <a:p>
             <a:pPr algn="ctr"/>
+            <a:endParaRPr/>
           </a:p>
         </p:txBody>
       </p:sp>
@@ -10973,7 +11037,7 @@
           <a:noFill/>
         </p:spPr>
         <p:txBody>
-          <a:bodyPr wrap="square" anchor="t" lIns="109728" rIns="109728" tIns="54864" bIns="54864">
+          <a:bodyPr wrap="square" lIns="109728" tIns="54864" rIns="109728" bIns="54864" anchor="t">
             <a:spAutoFit/>
           </a:bodyPr>
           <a:lstStyle/>
@@ -11015,7 +11079,7 @@
           <a:noFill/>
         </p:spPr>
         <p:txBody>
-          <a:bodyPr wrap="square" anchor="ctr" lIns="109728" rIns="109728" tIns="54864" bIns="54864">
+          <a:bodyPr wrap="square" lIns="109728" tIns="54864" rIns="109728" bIns="54864" anchor="ctr">
             <a:spAutoFit/>
           </a:bodyPr>
           <a:lstStyle/>
@@ -11081,6 +11145,7 @@
           <a:lstStyle/>
           <a:p>
             <a:pPr algn="ctr"/>
+            <a:endParaRPr/>
           </a:p>
         </p:txBody>
       </p:sp>
@@ -11101,7 +11166,7 @@
           <a:noFill/>
         </p:spPr>
         <p:txBody>
-          <a:bodyPr wrap="square" anchor="ctr" lIns="109728" rIns="109728" tIns="54864" bIns="54864">
+          <a:bodyPr wrap="square" lIns="109728" tIns="54864" rIns="109728" bIns="54864" anchor="ctr">
             <a:spAutoFit/>
           </a:bodyPr>
           <a:lstStyle/>
@@ -11143,7 +11208,7 @@
           <a:noFill/>
         </p:spPr>
         <p:txBody>
-          <a:bodyPr wrap="square" anchor="ctr" lIns="109728" rIns="109728" tIns="54864" bIns="54864">
+          <a:bodyPr wrap="square" lIns="109728" tIns="54864" rIns="109728" bIns="54864" anchor="ctr">
             <a:spAutoFit/>
           </a:bodyPr>
           <a:lstStyle/>
@@ -11185,7 +11250,7 @@
           <a:noFill/>
         </p:spPr>
         <p:txBody>
-          <a:bodyPr wrap="square" anchor="t" lIns="109728" rIns="109728" tIns="54864" bIns="54864">
+          <a:bodyPr wrap="square" lIns="109728" tIns="54864" rIns="109728" bIns="54864" anchor="t">
             <a:spAutoFit/>
           </a:bodyPr>
           <a:lstStyle/>
@@ -11253,6 +11318,7 @@
           <a:lstStyle/>
           <a:p>
             <a:pPr algn="ctr"/>
+            <a:endParaRPr/>
           </a:p>
         </p:txBody>
       </p:sp>
@@ -11293,7 +11359,7 @@
           </a:fontRef>
         </p:style>
         <p:txBody>
-          <a:bodyPr rtlCol="0" anchor="ctr" wrap="square" lIns="109728" rIns="109728" tIns="54864" bIns="54864"/>
+          <a:bodyPr wrap="square" lIns="109728" tIns="54864" rIns="109728" bIns="54864" rtlCol="0" anchor="ctr"/>
           <a:lstStyle/>
           <a:p>
             <a:pPr algn="ctr">
@@ -11333,7 +11399,7 @@
           <a:noFill/>
         </p:spPr>
         <p:txBody>
-          <a:bodyPr wrap="square" anchor="ctr" lIns="109728" rIns="109728" tIns="54864" bIns="54864">
+          <a:bodyPr wrap="square" lIns="109728" tIns="54864" rIns="109728" bIns="54864" anchor="ctr">
             <a:spAutoFit/>
           </a:bodyPr>
           <a:lstStyle/>
@@ -11420,6 +11486,7 @@
           <a:lstStyle/>
           <a:p>
             <a:pPr algn="ctr"/>
+            <a:endParaRPr/>
           </a:p>
         </p:txBody>
       </p:sp>
@@ -11460,7 +11527,7 @@
           </a:fontRef>
         </p:style>
         <p:txBody>
-          <a:bodyPr rtlCol="0" anchor="ctr" wrap="square" lIns="109728" rIns="109728" tIns="54864" bIns="54864"/>
+          <a:bodyPr wrap="square" lIns="109728" tIns="54864" rIns="109728" bIns="54864" rtlCol="0" anchor="ctr"/>
           <a:lstStyle/>
           <a:p>
             <a:pPr algn="ctr">
@@ -11500,7 +11567,7 @@
           <a:noFill/>
         </p:spPr>
         <p:txBody>
-          <a:bodyPr wrap="square" anchor="ctr" lIns="109728" rIns="109728" tIns="54864" bIns="54864">
+          <a:bodyPr wrap="square" lIns="109728" tIns="54864" rIns="109728" bIns="54864" anchor="ctr">
             <a:spAutoFit/>
           </a:bodyPr>
           <a:lstStyle/>
@@ -11587,6 +11654,7 @@
           <a:lstStyle/>
           <a:p>
             <a:pPr algn="ctr"/>
+            <a:endParaRPr/>
           </a:p>
         </p:txBody>
       </p:sp>
@@ -11627,7 +11695,7 @@
           </a:fontRef>
         </p:style>
         <p:txBody>
-          <a:bodyPr rtlCol="0" anchor="ctr" wrap="square" lIns="109728" rIns="109728" tIns="54864" bIns="54864"/>
+          <a:bodyPr wrap="square" lIns="109728" tIns="54864" rIns="109728" bIns="54864" rtlCol="0" anchor="ctr"/>
           <a:lstStyle/>
           <a:p>
             <a:pPr algn="ctr">
@@ -11667,7 +11735,7 @@
           <a:noFill/>
         </p:spPr>
         <p:txBody>
-          <a:bodyPr wrap="square" anchor="ctr" lIns="109728" rIns="109728" tIns="54864" bIns="54864">
+          <a:bodyPr wrap="square" lIns="109728" tIns="54864" rIns="109728" bIns="54864" anchor="ctr">
             <a:spAutoFit/>
           </a:bodyPr>
           <a:lstStyle/>
@@ -11754,6 +11822,7 @@
           <a:lstStyle/>
           <a:p>
             <a:pPr algn="ctr"/>
+            <a:endParaRPr/>
           </a:p>
         </p:txBody>
       </p:sp>
@@ -11794,7 +11863,7 @@
           </a:fontRef>
         </p:style>
         <p:txBody>
-          <a:bodyPr rtlCol="0" anchor="ctr" wrap="square" lIns="109728" rIns="109728" tIns="54864" bIns="54864"/>
+          <a:bodyPr wrap="square" lIns="109728" tIns="54864" rIns="109728" bIns="54864" rtlCol="0" anchor="ctr"/>
           <a:lstStyle/>
           <a:p>
             <a:pPr algn="ctr">
@@ -11834,7 +11903,7 @@
           <a:noFill/>
         </p:spPr>
         <p:txBody>
-          <a:bodyPr wrap="square" anchor="ctr" lIns="109728" rIns="109728" tIns="54864" bIns="54864">
+          <a:bodyPr wrap="square" lIns="109728" tIns="54864" rIns="109728" bIns="54864" anchor="ctr">
             <a:spAutoFit/>
           </a:bodyPr>
           <a:lstStyle/>
@@ -11887,7 +11956,7 @@
 </file>
 
 <file path=ppt/slides/slide6.xml><?xml version="1.0" encoding="utf-8"?>
-<p:sld xmlns:a="http://schemas.openxmlformats.org/drawingml/2006/main" xmlns:p="http://schemas.openxmlformats.org/presentationml/2006/main" xmlns:r="http://schemas.openxmlformats.org/officeDocument/2006/relationships">
+<p:sld xmlns:a="http://schemas.openxmlformats.org/drawingml/2006/main" xmlns:r="http://schemas.openxmlformats.org/officeDocument/2006/relationships" xmlns:p="http://schemas.openxmlformats.org/presentationml/2006/main">
   <p:cSld>
     <p:spTree>
       <p:nvGrpSpPr>
@@ -11895,7 +11964,14 @@
         <p:cNvGrpSpPr/>
         <p:nvPr/>
       </p:nvGrpSpPr>
-      <p:grpSpPr/>
+      <p:grpSpPr>
+        <a:xfrm>
+          <a:off x="0" y="0"/>
+          <a:ext cx="0" cy="0"/>
+          <a:chOff x="0" y="0"/>
+          <a:chExt cx="0" cy="0"/>
+        </a:xfrm>
+      </p:grpSpPr>
       <p:sp>
         <p:nvSpPr>
           <p:cNvPr id="2" name="Rectangle 1"/>
@@ -11937,6 +12013,7 @@
           <a:lstStyle/>
           <a:p>
             <a:pPr algn="ctr"/>
+            <a:endParaRPr/>
           </a:p>
         </p:txBody>
       </p:sp>
@@ -11981,6 +12058,7 @@
           <a:lstStyle/>
           <a:p>
             <a:pPr algn="ctr"/>
+            <a:endParaRPr/>
           </a:p>
         </p:txBody>
       </p:sp>
@@ -12001,7 +12079,7 @@
           <a:noFill/>
         </p:spPr>
         <p:txBody>
-          <a:bodyPr wrap="square" anchor="t" lIns="109728" rIns="109728" tIns="54864" bIns="54864">
+          <a:bodyPr wrap="square" lIns="109728" tIns="54864" rIns="109728" bIns="54864" anchor="t">
             <a:spAutoFit/>
           </a:bodyPr>
           <a:lstStyle/>
@@ -12043,7 +12121,7 @@
           <a:noFill/>
         </p:spPr>
         <p:txBody>
-          <a:bodyPr wrap="square" anchor="ctr" lIns="109728" rIns="109728" tIns="54864" bIns="54864">
+          <a:bodyPr wrap="square" lIns="109728" tIns="54864" rIns="109728" bIns="54864" anchor="ctr">
             <a:spAutoFit/>
           </a:bodyPr>
           <a:lstStyle/>
@@ -12109,6 +12187,7 @@
           <a:lstStyle/>
           <a:p>
             <a:pPr algn="ctr"/>
+            <a:endParaRPr/>
           </a:p>
         </p:txBody>
       </p:sp>
@@ -12129,7 +12208,7 @@
           <a:noFill/>
         </p:spPr>
         <p:txBody>
-          <a:bodyPr wrap="square" anchor="ctr" lIns="109728" rIns="109728" tIns="54864" bIns="54864">
+          <a:bodyPr wrap="square" lIns="109728" tIns="54864" rIns="109728" bIns="54864" anchor="ctr">
             <a:spAutoFit/>
           </a:bodyPr>
           <a:lstStyle/>
@@ -12171,7 +12250,7 @@
           <a:noFill/>
         </p:spPr>
         <p:txBody>
-          <a:bodyPr wrap="square" anchor="ctr" lIns="109728" rIns="109728" tIns="54864" bIns="54864">
+          <a:bodyPr wrap="square" lIns="109728" tIns="54864" rIns="109728" bIns="54864" anchor="ctr">
             <a:spAutoFit/>
           </a:bodyPr>
           <a:lstStyle/>
@@ -12221,13 +12300,6 @@
             </a:solidFill>
           </a:ln>
           <a:effectLst/>
-          <a:effectLst>
-            <a:outerShdw blurRad="60000" dist="25000" dir="5400000" rotWithShape="0">
-              <a:srgbClr val="1A1A2E">
-                <a:alpha val="22000"/>
-              </a:srgbClr>
-            </a:outerShdw>
-          </a:effectLst>
         </p:spPr>
         <p:style>
           <a:lnRef idx="1">
@@ -12248,6 +12320,7 @@
           <a:lstStyle/>
           <a:p>
             <a:pPr algn="ctr"/>
+            <a:endParaRPr/>
           </a:p>
         </p:txBody>
       </p:sp>
@@ -12292,6 +12365,7 @@
           <a:lstStyle/>
           <a:p>
             <a:pPr algn="ctr"/>
+            <a:endParaRPr/>
           </a:p>
         </p:txBody>
       </p:sp>
@@ -12312,7 +12386,7 @@
           <a:noFill/>
         </p:spPr>
         <p:txBody>
-          <a:bodyPr wrap="square" anchor="t" lIns="109728" rIns="109728" tIns="54864" bIns="54864">
+          <a:bodyPr wrap="square" lIns="109728" tIns="54864" rIns="109728" bIns="54864" anchor="t">
             <a:spAutoFit/>
           </a:bodyPr>
           <a:lstStyle/>
@@ -12381,13 +12455,6 @@
             </a:solidFill>
           </a:ln>
           <a:effectLst/>
-          <a:effectLst>
-            <a:outerShdw blurRad="60000" dist="25000" dir="5400000" rotWithShape="0">
-              <a:srgbClr val="1A1A2E">
-                <a:alpha val="22000"/>
-              </a:srgbClr>
-            </a:outerShdw>
-          </a:effectLst>
         </p:spPr>
         <p:style>
           <a:lnRef idx="1">
@@ -12408,6 +12475,7 @@
           <a:lstStyle/>
           <a:p>
             <a:pPr algn="ctr"/>
+            <a:endParaRPr/>
           </a:p>
         </p:txBody>
       </p:sp>
@@ -12452,6 +12520,7 @@
           <a:lstStyle/>
           <a:p>
             <a:pPr algn="ctr"/>
+            <a:endParaRPr/>
           </a:p>
         </p:txBody>
       </p:sp>
@@ -12472,7 +12541,7 @@
           <a:noFill/>
         </p:spPr>
         <p:txBody>
-          <a:bodyPr wrap="square" anchor="t" lIns="109728" rIns="109728" tIns="54864" bIns="54864">
+          <a:bodyPr wrap="square" lIns="109728" tIns="54864" rIns="109728" bIns="54864" anchor="t">
             <a:spAutoFit/>
           </a:bodyPr>
           <a:lstStyle/>
@@ -12541,13 +12610,6 @@
             </a:solidFill>
           </a:ln>
           <a:effectLst/>
-          <a:effectLst>
-            <a:outerShdw blurRad="60000" dist="25000" dir="5400000" rotWithShape="0">
-              <a:srgbClr val="1A1A2E">
-                <a:alpha val="22000"/>
-              </a:srgbClr>
-            </a:outerShdw>
-          </a:effectLst>
         </p:spPr>
         <p:style>
           <a:lnRef idx="1">
@@ -12568,6 +12630,7 @@
           <a:lstStyle/>
           <a:p>
             <a:pPr algn="ctr"/>
+            <a:endParaRPr/>
           </a:p>
         </p:txBody>
       </p:sp>
@@ -12612,6 +12675,7 @@
           <a:lstStyle/>
           <a:p>
             <a:pPr algn="ctr"/>
+            <a:endParaRPr/>
           </a:p>
         </p:txBody>
       </p:sp>
@@ -12632,7 +12696,7 @@
           <a:noFill/>
         </p:spPr>
         <p:txBody>
-          <a:bodyPr wrap="square" anchor="t" lIns="109728" rIns="109728" tIns="54864" bIns="54864">
+          <a:bodyPr wrap="square" lIns="109728" tIns="54864" rIns="109728" bIns="54864" anchor="t">
             <a:spAutoFit/>
           </a:bodyPr>
           <a:lstStyle/>
@@ -12685,7 +12749,7 @@
 </file>
 
 <file path=ppt/slides/slide7.xml><?xml version="1.0" encoding="utf-8"?>
-<p:sld xmlns:a="http://schemas.openxmlformats.org/drawingml/2006/main" xmlns:p="http://schemas.openxmlformats.org/presentationml/2006/main" xmlns:r="http://schemas.openxmlformats.org/officeDocument/2006/relationships">
+<p:sld xmlns:a="http://schemas.openxmlformats.org/drawingml/2006/main" xmlns:r="http://schemas.openxmlformats.org/officeDocument/2006/relationships" xmlns:p="http://schemas.openxmlformats.org/presentationml/2006/main">
   <p:cSld>
     <p:spTree>
       <p:nvGrpSpPr>
@@ -12693,7 +12757,14 @@
         <p:cNvGrpSpPr/>
         <p:nvPr/>
       </p:nvGrpSpPr>
-      <p:grpSpPr/>
+      <p:grpSpPr>
+        <a:xfrm>
+          <a:off x="0" y="0"/>
+          <a:ext cx="0" cy="0"/>
+          <a:chOff x="0" y="0"/>
+          <a:chExt cx="0" cy="0"/>
+        </a:xfrm>
+      </p:grpSpPr>
       <p:sp>
         <p:nvSpPr>
           <p:cNvPr id="2" name="Rectangle 1"/>
@@ -12735,6 +12806,7 @@
           <a:lstStyle/>
           <a:p>
             <a:pPr algn="ctr"/>
+            <a:endParaRPr/>
           </a:p>
         </p:txBody>
       </p:sp>
@@ -12779,6 +12851,7 @@
           <a:lstStyle/>
           <a:p>
             <a:pPr algn="ctr"/>
+            <a:endParaRPr/>
           </a:p>
         </p:txBody>
       </p:sp>
@@ -12799,7 +12872,7 @@
           <a:noFill/>
         </p:spPr>
         <p:txBody>
-          <a:bodyPr wrap="square" anchor="t" lIns="109728" rIns="109728" tIns="54864" bIns="54864">
+          <a:bodyPr wrap="square" lIns="109728" tIns="54864" rIns="109728" bIns="54864" anchor="t">
             <a:spAutoFit/>
           </a:bodyPr>
           <a:lstStyle/>
@@ -12841,7 +12914,7 @@
           <a:noFill/>
         </p:spPr>
         <p:txBody>
-          <a:bodyPr wrap="square" anchor="ctr" lIns="109728" rIns="109728" tIns="54864" bIns="54864">
+          <a:bodyPr wrap="square" lIns="109728" tIns="54864" rIns="109728" bIns="54864" anchor="ctr">
             <a:spAutoFit/>
           </a:bodyPr>
           <a:lstStyle/>
@@ -12907,6 +12980,7 @@
           <a:lstStyle/>
           <a:p>
             <a:pPr algn="ctr"/>
+            <a:endParaRPr/>
           </a:p>
         </p:txBody>
       </p:sp>
@@ -12927,7 +13001,7 @@
           <a:noFill/>
         </p:spPr>
         <p:txBody>
-          <a:bodyPr wrap="square" anchor="ctr" lIns="109728" rIns="109728" tIns="54864" bIns="54864">
+          <a:bodyPr wrap="square" lIns="109728" tIns="54864" rIns="109728" bIns="54864" anchor="ctr">
             <a:spAutoFit/>
           </a:bodyPr>
           <a:lstStyle/>
@@ -12969,7 +13043,7 @@
           <a:noFill/>
         </p:spPr>
         <p:txBody>
-          <a:bodyPr wrap="square" anchor="ctr" lIns="109728" rIns="109728" tIns="54864" bIns="54864">
+          <a:bodyPr wrap="square" lIns="109728" tIns="54864" rIns="109728" bIns="54864" anchor="ctr">
             <a:spAutoFit/>
           </a:bodyPr>
           <a:lstStyle/>
@@ -13019,13 +13093,6 @@
             </a:solidFill>
           </a:ln>
           <a:effectLst/>
-          <a:effectLst>
-            <a:outerShdw blurRad="60000" dist="25000" dir="5400000" rotWithShape="0">
-              <a:srgbClr val="1A1A2E">
-                <a:alpha val="22000"/>
-              </a:srgbClr>
-            </a:outerShdw>
-          </a:effectLst>
         </p:spPr>
         <p:style>
           <a:lnRef idx="1">
@@ -13046,6 +13113,7 @@
           <a:lstStyle/>
           <a:p>
             <a:pPr algn="ctr"/>
+            <a:endParaRPr/>
           </a:p>
         </p:txBody>
       </p:sp>
@@ -13090,6 +13158,7 @@
           <a:lstStyle/>
           <a:p>
             <a:pPr algn="ctr"/>
+            <a:endParaRPr/>
           </a:p>
         </p:txBody>
       </p:sp>
@@ -13110,7 +13179,7 @@
           <a:noFill/>
         </p:spPr>
         <p:txBody>
-          <a:bodyPr wrap="square" anchor="ctr" lIns="109728" rIns="109728" tIns="54864" bIns="54864">
+          <a:bodyPr wrap="square" lIns="109728" tIns="54864" rIns="109728" bIns="54864" anchor="ctr">
             <a:spAutoFit/>
           </a:bodyPr>
           <a:lstStyle/>
@@ -13152,7 +13221,7 @@
           <a:noFill/>
         </p:spPr>
         <p:txBody>
-          <a:bodyPr wrap="square" anchor="ctr" lIns="109728" rIns="109728" tIns="54864" bIns="54864">
+          <a:bodyPr wrap="square" lIns="109728" tIns="54864" rIns="109728" bIns="54864" anchor="ctr">
             <a:spAutoFit/>
           </a:bodyPr>
           <a:lstStyle/>
@@ -13218,6 +13287,7 @@
           <a:lstStyle/>
           <a:p>
             <a:pPr algn="ctr"/>
+            <a:endParaRPr/>
           </a:p>
         </p:txBody>
       </p:sp>
@@ -13246,13 +13316,6 @@
             </a:solidFill>
           </a:ln>
           <a:effectLst/>
-          <a:effectLst>
-            <a:outerShdw blurRad="60000" dist="25000" dir="5400000" rotWithShape="0">
-              <a:srgbClr val="1A1A2E">
-                <a:alpha val="22000"/>
-              </a:srgbClr>
-            </a:outerShdw>
-          </a:effectLst>
         </p:spPr>
         <p:style>
           <a:lnRef idx="1">
@@ -13273,6 +13336,7 @@
           <a:lstStyle/>
           <a:p>
             <a:pPr algn="ctr"/>
+            <a:endParaRPr/>
           </a:p>
         </p:txBody>
       </p:sp>
@@ -13317,6 +13381,7 @@
           <a:lstStyle/>
           <a:p>
             <a:pPr algn="ctr"/>
+            <a:endParaRPr/>
           </a:p>
         </p:txBody>
       </p:sp>
@@ -13337,7 +13402,7 @@
           <a:noFill/>
         </p:spPr>
         <p:txBody>
-          <a:bodyPr wrap="square" anchor="ctr" lIns="109728" rIns="109728" tIns="54864" bIns="54864">
+          <a:bodyPr wrap="square" lIns="109728" tIns="54864" rIns="109728" bIns="54864" anchor="ctr">
             <a:spAutoFit/>
           </a:bodyPr>
           <a:lstStyle/>
@@ -13379,7 +13444,7 @@
           <a:noFill/>
         </p:spPr>
         <p:txBody>
-          <a:bodyPr wrap="square" anchor="ctr" lIns="109728" rIns="109728" tIns="54864" bIns="54864">
+          <a:bodyPr wrap="square" lIns="109728" tIns="54864" rIns="109728" bIns="54864" anchor="ctr">
             <a:spAutoFit/>
           </a:bodyPr>
           <a:lstStyle/>
@@ -13445,6 +13510,7 @@
           <a:lstStyle/>
           <a:p>
             <a:pPr algn="ctr"/>
+            <a:endParaRPr/>
           </a:p>
         </p:txBody>
       </p:sp>
@@ -13473,13 +13539,6 @@
             </a:solidFill>
           </a:ln>
           <a:effectLst/>
-          <a:effectLst>
-            <a:outerShdw blurRad="60000" dist="25000" dir="5400000" rotWithShape="0">
-              <a:srgbClr val="1A1A2E">
-                <a:alpha val="22000"/>
-              </a:srgbClr>
-            </a:outerShdw>
-          </a:effectLst>
         </p:spPr>
         <p:style>
           <a:lnRef idx="1">
@@ -13500,6 +13559,7 @@
           <a:lstStyle/>
           <a:p>
             <a:pPr algn="ctr"/>
+            <a:endParaRPr/>
           </a:p>
         </p:txBody>
       </p:sp>
@@ -13544,6 +13604,7 @@
           <a:lstStyle/>
           <a:p>
             <a:pPr algn="ctr"/>
+            <a:endParaRPr/>
           </a:p>
         </p:txBody>
       </p:sp>
@@ -13564,7 +13625,7 @@
           <a:noFill/>
         </p:spPr>
         <p:txBody>
-          <a:bodyPr wrap="square" anchor="ctr" lIns="109728" rIns="109728" tIns="54864" bIns="54864">
+          <a:bodyPr wrap="square" lIns="109728" tIns="54864" rIns="109728" bIns="54864" anchor="ctr">
             <a:spAutoFit/>
           </a:bodyPr>
           <a:lstStyle/>
@@ -13606,7 +13667,7 @@
           <a:noFill/>
         </p:spPr>
         <p:txBody>
-          <a:bodyPr wrap="square" anchor="ctr" lIns="109728" rIns="109728" tIns="54864" bIns="54864">
+          <a:bodyPr wrap="square" lIns="109728" tIns="54864" rIns="109728" bIns="54864" anchor="ctr">
             <a:spAutoFit/>
           </a:bodyPr>
           <a:lstStyle/>
@@ -13648,7 +13709,7 @@
           <a:noFill/>
         </p:spPr>
         <p:txBody>
-          <a:bodyPr wrap="square" anchor="t" lIns="109728" rIns="109728" tIns="54864" bIns="54864">
+          <a:bodyPr wrap="square" lIns="109728" tIns="54864" rIns="109728" bIns="54864" anchor="t">
             <a:spAutoFit/>
           </a:bodyPr>
           <a:lstStyle/>
@@ -13682,7 +13743,7 @@
 </file>
 
 <file path=ppt/slides/slide8.xml><?xml version="1.0" encoding="utf-8"?>
-<p:sld xmlns:a="http://schemas.openxmlformats.org/drawingml/2006/main" xmlns:p="http://schemas.openxmlformats.org/presentationml/2006/main" xmlns:r="http://schemas.openxmlformats.org/officeDocument/2006/relationships">
+<p:sld xmlns:a="http://schemas.openxmlformats.org/drawingml/2006/main" xmlns:r="http://schemas.openxmlformats.org/officeDocument/2006/relationships" xmlns:p="http://schemas.openxmlformats.org/presentationml/2006/main">
   <p:cSld>
     <p:spTree>
       <p:nvGrpSpPr>
@@ -13690,7 +13751,14 @@
         <p:cNvGrpSpPr/>
         <p:nvPr/>
       </p:nvGrpSpPr>
-      <p:grpSpPr/>
+      <p:grpSpPr>
+        <a:xfrm>
+          <a:off x="0" y="0"/>
+          <a:ext cx="0" cy="0"/>
+          <a:chOff x="0" y="0"/>
+          <a:chExt cx="0" cy="0"/>
+        </a:xfrm>
+      </p:grpSpPr>
       <p:sp>
         <p:nvSpPr>
           <p:cNvPr id="2" name="Rectangle 1"/>
@@ -13732,6 +13800,7 @@
           <a:lstStyle/>
           <a:p>
             <a:pPr algn="ctr"/>
+            <a:endParaRPr/>
           </a:p>
         </p:txBody>
       </p:sp>
@@ -13776,6 +13845,7 @@
           <a:lstStyle/>
           <a:p>
             <a:pPr algn="ctr"/>
+            <a:endParaRPr/>
           </a:p>
         </p:txBody>
       </p:sp>
@@ -13796,7 +13866,7 @@
           <a:noFill/>
         </p:spPr>
         <p:txBody>
-          <a:bodyPr wrap="square" anchor="t" lIns="109728" rIns="109728" tIns="54864" bIns="54864">
+          <a:bodyPr wrap="square" lIns="109728" tIns="54864" rIns="109728" bIns="54864" anchor="t">
             <a:spAutoFit/>
           </a:bodyPr>
           <a:lstStyle/>
@@ -13838,7 +13908,7 @@
           <a:noFill/>
         </p:spPr>
         <p:txBody>
-          <a:bodyPr wrap="square" anchor="ctr" lIns="109728" rIns="109728" tIns="54864" bIns="54864">
+          <a:bodyPr wrap="square" lIns="109728" tIns="54864" rIns="109728" bIns="54864" anchor="ctr">
             <a:spAutoFit/>
           </a:bodyPr>
           <a:lstStyle/>
@@ -13904,6 +13974,7 @@
           <a:lstStyle/>
           <a:p>
             <a:pPr algn="ctr"/>
+            <a:endParaRPr/>
           </a:p>
         </p:txBody>
       </p:sp>
@@ -13924,7 +13995,7 @@
           <a:noFill/>
         </p:spPr>
         <p:txBody>
-          <a:bodyPr wrap="square" anchor="ctr" lIns="109728" rIns="109728" tIns="54864" bIns="54864">
+          <a:bodyPr wrap="square" lIns="109728" tIns="54864" rIns="109728" bIns="54864" anchor="ctr">
             <a:spAutoFit/>
           </a:bodyPr>
           <a:lstStyle/>
@@ -13966,7 +14037,7 @@
           <a:noFill/>
         </p:spPr>
         <p:txBody>
-          <a:bodyPr wrap="square" anchor="ctr" lIns="109728" rIns="109728" tIns="54864" bIns="54864">
+          <a:bodyPr wrap="square" lIns="109728" tIns="54864" rIns="109728" bIns="54864" anchor="ctr">
             <a:spAutoFit/>
           </a:bodyPr>
           <a:lstStyle/>
@@ -14016,13 +14087,6 @@
             </a:solidFill>
           </a:ln>
           <a:effectLst/>
-          <a:effectLst>
-            <a:outerShdw blurRad="60000" dist="25000" dir="5400000" rotWithShape="0">
-              <a:srgbClr val="1A1A2E">
-                <a:alpha val="22000"/>
-              </a:srgbClr>
-            </a:outerShdw>
-          </a:effectLst>
         </p:spPr>
         <p:style>
           <a:lnRef idx="1">
@@ -14043,6 +14107,7 @@
           <a:lstStyle/>
           <a:p>
             <a:pPr algn="ctr"/>
+            <a:endParaRPr/>
           </a:p>
         </p:txBody>
       </p:sp>
@@ -14087,6 +14152,7 @@
           <a:lstStyle/>
           <a:p>
             <a:pPr algn="ctr"/>
+            <a:endParaRPr/>
           </a:p>
         </p:txBody>
       </p:sp>
@@ -14107,7 +14173,7 @@
           <a:noFill/>
         </p:spPr>
         <p:txBody>
-          <a:bodyPr wrap="square" anchor="ctr" lIns="109728" rIns="109728" tIns="54864" bIns="54864">
+          <a:bodyPr wrap="square" lIns="109728" tIns="54864" rIns="109728" bIns="54864" anchor="ctr">
             <a:spAutoFit/>
           </a:bodyPr>
           <a:lstStyle/>
@@ -14149,7 +14215,7 @@
           <a:noFill/>
         </p:spPr>
         <p:txBody>
-          <a:bodyPr wrap="square" anchor="ctr" lIns="109728" rIns="109728" tIns="54864" bIns="54864">
+          <a:bodyPr wrap="square" lIns="109728" tIns="54864" rIns="109728" bIns="54864" anchor="ctr">
             <a:spAutoFit/>
           </a:bodyPr>
           <a:lstStyle/>
@@ -14215,6 +14281,7 @@
           <a:lstStyle/>
           <a:p>
             <a:pPr algn="ctr"/>
+            <a:endParaRPr/>
           </a:p>
         </p:txBody>
       </p:sp>
@@ -14243,13 +14310,6 @@
             </a:solidFill>
           </a:ln>
           <a:effectLst/>
-          <a:effectLst>
-            <a:outerShdw blurRad="60000" dist="25000" dir="5400000" rotWithShape="0">
-              <a:srgbClr val="1A1A2E">
-                <a:alpha val="22000"/>
-              </a:srgbClr>
-            </a:outerShdw>
-          </a:effectLst>
         </p:spPr>
         <p:style>
           <a:lnRef idx="1">
@@ -14270,6 +14330,7 @@
           <a:lstStyle/>
           <a:p>
             <a:pPr algn="ctr"/>
+            <a:endParaRPr/>
           </a:p>
         </p:txBody>
       </p:sp>
@@ -14314,6 +14375,7 @@
           <a:lstStyle/>
           <a:p>
             <a:pPr algn="ctr"/>
+            <a:endParaRPr/>
           </a:p>
         </p:txBody>
       </p:sp>
@@ -14334,7 +14396,7 @@
           <a:noFill/>
         </p:spPr>
         <p:txBody>
-          <a:bodyPr wrap="square" anchor="ctr" lIns="109728" rIns="109728" tIns="54864" bIns="54864">
+          <a:bodyPr wrap="square" lIns="109728" tIns="54864" rIns="109728" bIns="54864" anchor="ctr">
             <a:spAutoFit/>
           </a:bodyPr>
           <a:lstStyle/>
@@ -14376,7 +14438,7 @@
           <a:noFill/>
         </p:spPr>
         <p:txBody>
-          <a:bodyPr wrap="square" anchor="ctr" lIns="109728" rIns="109728" tIns="54864" bIns="54864">
+          <a:bodyPr wrap="square" lIns="109728" tIns="54864" rIns="109728" bIns="54864" anchor="ctr">
             <a:spAutoFit/>
           </a:bodyPr>
           <a:lstStyle/>
@@ -14442,6 +14504,7 @@
           <a:lstStyle/>
           <a:p>
             <a:pPr algn="ctr"/>
+            <a:endParaRPr/>
           </a:p>
         </p:txBody>
       </p:sp>
@@ -14470,13 +14533,6 @@
             </a:solidFill>
           </a:ln>
           <a:effectLst/>
-          <a:effectLst>
-            <a:outerShdw blurRad="60000" dist="25000" dir="5400000" rotWithShape="0">
-              <a:srgbClr val="1A1A2E">
-                <a:alpha val="22000"/>
-              </a:srgbClr>
-            </a:outerShdw>
-          </a:effectLst>
         </p:spPr>
         <p:style>
           <a:lnRef idx="1">
@@ -14497,6 +14553,7 @@
           <a:lstStyle/>
           <a:p>
             <a:pPr algn="ctr"/>
+            <a:endParaRPr/>
           </a:p>
         </p:txBody>
       </p:sp>
@@ -14541,6 +14598,7 @@
           <a:lstStyle/>
           <a:p>
             <a:pPr algn="ctr"/>
+            <a:endParaRPr/>
           </a:p>
         </p:txBody>
       </p:sp>
@@ -14561,7 +14619,7 @@
           <a:noFill/>
         </p:spPr>
         <p:txBody>
-          <a:bodyPr wrap="square" anchor="ctr" lIns="109728" rIns="109728" tIns="54864" bIns="54864">
+          <a:bodyPr wrap="square" lIns="109728" tIns="54864" rIns="109728" bIns="54864" anchor="ctr">
             <a:spAutoFit/>
           </a:bodyPr>
           <a:lstStyle/>
@@ -14603,7 +14661,7 @@
           <a:noFill/>
         </p:spPr>
         <p:txBody>
-          <a:bodyPr wrap="square" anchor="ctr" lIns="109728" rIns="109728" tIns="54864" bIns="54864">
+          <a:bodyPr wrap="square" lIns="109728" tIns="54864" rIns="109728" bIns="54864" anchor="ctr">
             <a:spAutoFit/>
           </a:bodyPr>
           <a:lstStyle/>
@@ -14669,6 +14727,7 @@
           <a:lstStyle/>
           <a:p>
             <a:pPr algn="ctr"/>
+            <a:endParaRPr/>
           </a:p>
         </p:txBody>
       </p:sp>
@@ -14697,13 +14756,6 @@
             </a:solidFill>
           </a:ln>
           <a:effectLst/>
-          <a:effectLst>
-            <a:outerShdw blurRad="60000" dist="25000" dir="5400000" rotWithShape="0">
-              <a:srgbClr val="1A1A2E">
-                <a:alpha val="22000"/>
-              </a:srgbClr>
-            </a:outerShdw>
-          </a:effectLst>
         </p:spPr>
         <p:style>
           <a:lnRef idx="1">
@@ -14724,6 +14776,7 @@
           <a:lstStyle/>
           <a:p>
             <a:pPr algn="ctr"/>
+            <a:endParaRPr/>
           </a:p>
         </p:txBody>
       </p:sp>
@@ -14768,6 +14821,7 @@
           <a:lstStyle/>
           <a:p>
             <a:pPr algn="ctr"/>
+            <a:endParaRPr/>
           </a:p>
         </p:txBody>
       </p:sp>
@@ -14788,7 +14842,7 @@
           <a:noFill/>
         </p:spPr>
         <p:txBody>
-          <a:bodyPr wrap="square" anchor="ctr" lIns="109728" rIns="109728" tIns="54864" bIns="54864">
+          <a:bodyPr wrap="square" lIns="109728" tIns="54864" rIns="109728" bIns="54864" anchor="ctr">
             <a:spAutoFit/>
           </a:bodyPr>
           <a:lstStyle/>
@@ -14830,7 +14884,7 @@
           <a:noFill/>
         </p:spPr>
         <p:txBody>
-          <a:bodyPr wrap="square" anchor="ctr" lIns="109728" rIns="109728" tIns="54864" bIns="54864">
+          <a:bodyPr wrap="square" lIns="109728" tIns="54864" rIns="109728" bIns="54864" anchor="ctr">
             <a:spAutoFit/>
           </a:bodyPr>
           <a:lstStyle/>
@@ -14872,7 +14926,7 @@
           <a:noFill/>
         </p:spPr>
         <p:txBody>
-          <a:bodyPr wrap="square" anchor="t" lIns="109728" rIns="109728" tIns="54864" bIns="54864">
+          <a:bodyPr wrap="square" lIns="109728" tIns="54864" rIns="109728" bIns="54864" anchor="t">
             <a:spAutoFit/>
           </a:bodyPr>
           <a:lstStyle/>
@@ -14936,7 +14990,7 @@
           </a:fontRef>
         </p:style>
         <p:txBody>
-          <a:bodyPr rtlCol="0" anchor="ctr" wrap="square" lIns="109728" rIns="109728" tIns="54864" bIns="54864"/>
+          <a:bodyPr wrap="square" lIns="109728" tIns="54864" rIns="109728" bIns="54864" rtlCol="0" anchor="ctr"/>
           <a:lstStyle/>
           <a:p>
             <a:pPr algn="ctr">
@@ -14968,7 +15022,7 @@
 </file>
 
 <file path=ppt/slides/slide9.xml><?xml version="1.0" encoding="utf-8"?>
-<p:sld xmlns:a="http://schemas.openxmlformats.org/drawingml/2006/main" xmlns:p="http://schemas.openxmlformats.org/presentationml/2006/main" xmlns:r="http://schemas.openxmlformats.org/officeDocument/2006/relationships">
+<p:sld xmlns:a="http://schemas.openxmlformats.org/drawingml/2006/main" xmlns:r="http://schemas.openxmlformats.org/officeDocument/2006/relationships" xmlns:p="http://schemas.openxmlformats.org/presentationml/2006/main">
   <p:cSld>
     <p:spTree>
       <p:nvGrpSpPr>
@@ -14976,7 +15030,14 @@
         <p:cNvGrpSpPr/>
         <p:nvPr/>
       </p:nvGrpSpPr>
-      <p:grpSpPr/>
+      <p:grpSpPr>
+        <a:xfrm>
+          <a:off x="0" y="0"/>
+          <a:ext cx="0" cy="0"/>
+          <a:chOff x="0" y="0"/>
+          <a:chExt cx="0" cy="0"/>
+        </a:xfrm>
+      </p:grpSpPr>
       <p:sp>
         <p:nvSpPr>
           <p:cNvPr id="2" name="Rectangle 1"/>
@@ -15018,6 +15079,7 @@
           <a:lstStyle/>
           <a:p>
             <a:pPr algn="ctr"/>
+            <a:endParaRPr/>
           </a:p>
         </p:txBody>
       </p:sp>
@@ -15062,6 +15124,7 @@
           <a:lstStyle/>
           <a:p>
             <a:pPr algn="ctr"/>
+            <a:endParaRPr/>
           </a:p>
         </p:txBody>
       </p:sp>
@@ -15082,7 +15145,7 @@
           <a:noFill/>
         </p:spPr>
         <p:txBody>
-          <a:bodyPr wrap="square" anchor="t" lIns="109728" rIns="109728" tIns="54864" bIns="54864">
+          <a:bodyPr wrap="square" lIns="109728" tIns="54864" rIns="109728" bIns="54864" anchor="t">
             <a:spAutoFit/>
           </a:bodyPr>
           <a:lstStyle/>
@@ -15124,7 +15187,7 @@
           <a:noFill/>
         </p:spPr>
         <p:txBody>
-          <a:bodyPr wrap="square" anchor="ctr" lIns="109728" rIns="109728" tIns="54864" bIns="54864">
+          <a:bodyPr wrap="square" lIns="109728" tIns="54864" rIns="109728" bIns="54864" anchor="ctr">
             <a:spAutoFit/>
           </a:bodyPr>
           <a:lstStyle/>
@@ -15190,6 +15253,7 @@
           <a:lstStyle/>
           <a:p>
             <a:pPr algn="ctr"/>
+            <a:endParaRPr/>
           </a:p>
         </p:txBody>
       </p:sp>
@@ -15210,7 +15274,7 @@
           <a:noFill/>
         </p:spPr>
         <p:txBody>
-          <a:bodyPr wrap="square" anchor="ctr" lIns="109728" rIns="109728" tIns="54864" bIns="54864">
+          <a:bodyPr wrap="square" lIns="109728" tIns="54864" rIns="109728" bIns="54864" anchor="ctr">
             <a:spAutoFit/>
           </a:bodyPr>
           <a:lstStyle/>
@@ -15252,7 +15316,7 @@
           <a:noFill/>
         </p:spPr>
         <p:txBody>
-          <a:bodyPr wrap="square" anchor="ctr" lIns="109728" rIns="109728" tIns="54864" bIns="54864">
+          <a:bodyPr wrap="square" lIns="109728" tIns="54864" rIns="109728" bIns="54864" anchor="ctr">
             <a:spAutoFit/>
           </a:bodyPr>
           <a:lstStyle/>
@@ -15302,13 +15366,6 @@
             </a:solidFill>
           </a:ln>
           <a:effectLst/>
-          <a:effectLst>
-            <a:outerShdw blurRad="60000" dist="25000" dir="5400000" rotWithShape="0">
-              <a:srgbClr val="1A1A2E">
-                <a:alpha val="22000"/>
-              </a:srgbClr>
-            </a:outerShdw>
-          </a:effectLst>
         </p:spPr>
         <p:style>
           <a:lnRef idx="1">
@@ -15329,6 +15386,7 @@
           <a:lstStyle/>
           <a:p>
             <a:pPr algn="ctr"/>
+            <a:endParaRPr/>
           </a:p>
         </p:txBody>
       </p:sp>
@@ -15373,6 +15431,7 @@
           <a:lstStyle/>
           <a:p>
             <a:pPr algn="ctr"/>
+            <a:endParaRPr/>
           </a:p>
         </p:txBody>
       </p:sp>
@@ -15393,7 +15452,7 @@
           <a:noFill/>
         </p:spPr>
         <p:txBody>
-          <a:bodyPr wrap="square" anchor="t" lIns="109728" rIns="109728" tIns="54864" bIns="54864">
+          <a:bodyPr wrap="square" lIns="109728" tIns="54864" rIns="109728" bIns="54864" anchor="t">
             <a:spAutoFit/>
           </a:bodyPr>
           <a:lstStyle/>
@@ -15462,13 +15521,6 @@
             </a:solidFill>
           </a:ln>
           <a:effectLst/>
-          <a:effectLst>
-            <a:outerShdw blurRad="60000" dist="25000" dir="5400000" rotWithShape="0">
-              <a:srgbClr val="1A1A2E">
-                <a:alpha val="22000"/>
-              </a:srgbClr>
-            </a:outerShdw>
-          </a:effectLst>
         </p:spPr>
         <p:style>
           <a:lnRef idx="1">
@@ -15489,6 +15541,7 @@
           <a:lstStyle/>
           <a:p>
             <a:pPr algn="ctr"/>
+            <a:endParaRPr/>
           </a:p>
         </p:txBody>
       </p:sp>
@@ -15533,6 +15586,7 @@
           <a:lstStyle/>
           <a:p>
             <a:pPr algn="ctr"/>
+            <a:endParaRPr/>
           </a:p>
         </p:txBody>
       </p:sp>
@@ -15553,7 +15607,7 @@
           <a:noFill/>
         </p:spPr>
         <p:txBody>
-          <a:bodyPr wrap="square" anchor="t" lIns="109728" rIns="109728" tIns="54864" bIns="54864">
+          <a:bodyPr wrap="square" lIns="109728" tIns="54864" rIns="109728" bIns="54864" anchor="t">
             <a:spAutoFit/>
           </a:bodyPr>
           <a:lstStyle/>
@@ -15622,13 +15676,6 @@
             </a:solidFill>
           </a:ln>
           <a:effectLst/>
-          <a:effectLst>
-            <a:outerShdw blurRad="60000" dist="25000" dir="5400000" rotWithShape="0">
-              <a:srgbClr val="1A1A2E">
-                <a:alpha val="22000"/>
-              </a:srgbClr>
-            </a:outerShdw>
-          </a:effectLst>
         </p:spPr>
         <p:style>
           <a:lnRef idx="1">
@@ -15649,6 +15696,7 @@
           <a:lstStyle/>
           <a:p>
             <a:pPr algn="ctr"/>
+            <a:endParaRPr/>
           </a:p>
         </p:txBody>
       </p:sp>
@@ -15693,6 +15741,7 @@
           <a:lstStyle/>
           <a:p>
             <a:pPr algn="ctr"/>
+            <a:endParaRPr/>
           </a:p>
         </p:txBody>
       </p:sp>
@@ -15713,7 +15762,7 @@
           <a:noFill/>
         </p:spPr>
         <p:txBody>
-          <a:bodyPr wrap="square" anchor="t" lIns="109728" rIns="109728" tIns="54864" bIns="54864">
+          <a:bodyPr wrap="square" lIns="109728" tIns="54864" rIns="109728" bIns="54864" anchor="t">
             <a:spAutoFit/>
           </a:bodyPr>
           <a:lstStyle/>
